--- a/slides/decks/s13-relapse-mrd-dli.pptx
+++ b/slides/decks/s13-relapse-mrd-dli.pptx
@@ -135,13 +135,13 @@
   <p:extLst>
     <p:ext uri="{521415D9-36F7-43E2-AB2F-B90AF26B5E84}">
       <p14:sectionLst xmlns:p14="http://schemas.microsoft.com/office/powerpoint/2010/main">
-        <p14:section name="Opening" id="{9244c8ab-80f7-6b4d-f134-8484bfa036db}">
+        <p14:section name="Opening" id="{a0d9b5df-f107-47b4-7828-c2301a05bf76}">
           <p14:sldIdLst>
             <p14:sldId id="256"/>
             <p14:sldId id="257"/>
           </p14:sldIdLst>
         </p14:section>
-        <p14:section name="MRD" id="{9c93f35a-26bd-3255-fd9e-c88a79feb9c3}">
+        <p14:section name="MRD" id="{8f968b21-a455-f3cf-45dc-3357fb2d73ec}">
           <p14:sldIdLst>
             <p14:sldId id="258"/>
             <p14:sldId id="259"/>
@@ -151,7 +151,7 @@
             <p14:sldId id="263"/>
           </p14:sldIdLst>
         </p14:section>
-        <p14:section name="Drugs" id="{d0a6373c-f4e5-06fc-2320-8f113b79cbed}">
+        <p14:section name="Drugs" id="{4bdea69e-ca92-3bc5-1eae-2f604c11e631}">
           <p14:sldIdLst>
             <p14:sldId id="264"/>
             <p14:sldId id="265"/>
@@ -160,14 +160,14 @@
             <p14:sldId id="268"/>
           </p14:sldIdLst>
         </p14:section>
-        <p14:section name="Donor lymphocyte infusion" id="{03485cf1-1101-b4f6-db4c-d88c5cbf3cf7}">
+        <p14:section name="Donor lymphocyte infusion" id="{38381842-ad12-20f0-3654-71b4945b698b}">
           <p14:sldIdLst>
             <p14:sldId id="269"/>
             <p14:sldId id="270"/>
             <p14:sldId id="271"/>
           </p14:sldIdLst>
         </p14:section>
-        <p14:section name="Board questions" id="{dd02f6f0-151b-3fa7-75af-f85ceae095ec}">
+        <p14:section name="Board questions" id="{6ba59ab6-9a07-0e2e-dccf-7dd81ee0d3e2}">
           <p14:sldIdLst>
             <p14:sldId id="272"/>
             <p14:sldId id="273"/>
@@ -177,7 +177,7 @@
             <p14:sldId id="277"/>
           </p14:sldIdLst>
         </p14:section>
-        <p14:section name="References" id="{7e70de73-8b51-8638-ad24-60642018e4ec}">
+        <p14:section name="References" id="{51237134-4cd1-1277-62e2-2a50c12a37a3}">
           <p14:sldIdLst>
             <p14:sldId id="278"/>
             <p14:sldId id="279"/>
@@ -185,7 +185,7 @@
             <p14:sldId id="281"/>
           </p14:sldIdLst>
         </p14:section>
-        <p14:section name="Backup" id="{f4348c8b-1653-72b5-4359-325c05c90504}">
+        <p14:section name="Backup" id="{056d1003-5be7-487a-7361-0e249248b654}">
           <p14:sldIdLst>
             <p14:sldId id="282"/>
             <p14:sldId id="283"/>
@@ -5551,9 +5551,9 @@
             <a:tbl>
               <a:tblPr/>
               <a:tblGrid>
-                <a:gridCol w="3849624"/>
-                <a:gridCol w="2752344"/>
                 <a:gridCol w="4215384"/>
+                <a:gridCol w="2569464"/>
+                <a:gridCol w="4032504"/>
               </a:tblGrid>
               <a:tr h="0">
                 <a:tc>
@@ -5565,14 +5565,14 @@
                         <a:buNone/>
                       </a:pPr>
                       <a:r>
-                        <a:rPr lang="en-US" sz="1600" b="1" dirty="0">
+                        <a:rPr lang="en-US" sz="1700" b="1" dirty="0">
                           <a:solidFill>
                             <a:schemeClr val="tx1"/>
                           </a:solidFill>
                         </a:rPr>
                         <a:t>Agent or study</a:t>
                       </a:r>
-                      <a:endParaRPr lang="en-US" sz="1600" dirty="0"/>
+                      <a:endParaRPr lang="en-US" sz="1700" dirty="0"/>
                     </a:p>
                   </a:txBody>
                   <a:tcPr marL="25400" marR="101600" marT="63500" marB="63500" anchor="ctr">
@@ -5611,14 +5611,14 @@
                         <a:buNone/>
                       </a:pPr>
                       <a:r>
-                        <a:rPr lang="en-US" sz="1600" b="1" dirty="0">
+                        <a:rPr lang="en-US" sz="1700" b="1" dirty="0">
                           <a:solidFill>
                             <a:schemeClr val="tx1"/>
                           </a:solidFill>
                         </a:rPr>
                         <a:t>Design</a:t>
                       </a:r>
-                      <a:endParaRPr lang="en-US" sz="1600" dirty="0"/>
+                      <a:endParaRPr lang="en-US" sz="1700" dirty="0"/>
                     </a:p>
                   </a:txBody>
                   <a:tcPr marL="25400" marR="101600" marT="63500" marB="63500" anchor="ctr">
@@ -5657,14 +5657,14 @@
                         <a:buNone/>
                       </a:pPr>
                       <a:r>
-                        <a:rPr lang="en-US" sz="1600" b="1" dirty="0">
+                        <a:rPr lang="en-US" sz="1700" b="1" dirty="0">
                           <a:solidFill>
                             <a:schemeClr val="tx1"/>
                           </a:solidFill>
                         </a:rPr>
                         <a:t>Result</a:t>
                       </a:r>
-                      <a:endParaRPr lang="en-US" sz="1600" dirty="0"/>
+                      <a:endParaRPr lang="en-US" sz="1700" dirty="0"/>
                     </a:p>
                   </a:txBody>
                   <a:tcPr marL="25400" marR="101600" marT="63500" marB="63500" anchor="ctr">
@@ -5705,14 +5705,14 @@
                         <a:buNone/>
                       </a:pPr>
                       <a:r>
-                        <a:rPr lang="en-US" sz="1600" dirty="0">
+                        <a:rPr lang="en-US" sz="1700" dirty="0">
                           <a:solidFill>
                             <a:schemeClr val="tx1"/>
                           </a:solidFill>
                         </a:rPr>
                         <a:t>Baseline risk</a:t>
                       </a:r>
-                      <a:endParaRPr lang="en-US" sz="1600" dirty="0"/>
+                      <a:endParaRPr lang="en-US" sz="1700" dirty="0"/>
                     </a:p>
                   </a:txBody>
                   <a:tcPr marL="25400" marR="101600" marT="63500" marB="63500" anchor="ctr">
@@ -5745,14 +5745,14 @@
                         <a:buNone/>
                       </a:pPr>
                       <a:r>
-                        <a:rPr lang="en-US" sz="1600" dirty="0">
+                        <a:rPr lang="en-US" sz="1700" dirty="0">
                           <a:solidFill>
                             <a:schemeClr val="tx1"/>
                           </a:solidFill>
                         </a:rPr>
                         <a:t>Allo-HCT in CR1</a:t>
                       </a:r>
-                      <a:endParaRPr lang="en-US" sz="1600" dirty="0"/>
+                      <a:endParaRPr lang="en-US" sz="1700" dirty="0"/>
                     </a:p>
                   </a:txBody>
                   <a:tcPr marL="25400" marR="101600" marT="63500" marB="63500" anchor="ctr">
@@ -5785,14 +5785,14 @@
                         <a:buNone/>
                       </a:pPr>
                       <a:r>
-                        <a:rPr lang="en-US" sz="1600" dirty="0">
+                        <a:rPr lang="en-US" sz="1700" dirty="0">
                           <a:solidFill>
                             <a:schemeClr val="tx1"/>
                           </a:solidFill>
                         </a:rPr>
                         <a:t>Relapse 30% if FLT3-ITD+ vs 16%</a:t>
                       </a:r>
-                      <a:endParaRPr lang="en-US" sz="1600" dirty="0"/>
+                      <a:endParaRPr lang="en-US" sz="1700" dirty="0"/>
                     </a:p>
                   </a:txBody>
                   <a:tcPr marL="25400" marR="101600" marT="63500" marB="63500" anchor="ctr">
@@ -5827,14 +5827,14 @@
                         <a:buNone/>
                       </a:pPr>
                       <a:r>
-                        <a:rPr lang="en-US" sz="1600" dirty="0">
+                        <a:rPr lang="en-US" sz="1700" dirty="0">
                           <a:solidFill>
                             <a:schemeClr val="tx1"/>
                           </a:solidFill>
                         </a:rPr>
                         <a:t>Midostaurin (Maziarz 2018)</a:t>
                       </a:r>
-                      <a:endParaRPr lang="en-US" sz="1600" dirty="0"/>
+                      <a:endParaRPr lang="en-US" sz="1700" dirty="0"/>
                     </a:p>
                   </a:txBody>
                   <a:tcPr marL="25400" marR="101600" marT="63500" marB="63500" anchor="ctr">
@@ -5867,14 +5867,14 @@
                         <a:buNone/>
                       </a:pPr>
                       <a:r>
-                        <a:rPr lang="en-US" sz="1600" dirty="0">
-                          <a:solidFill>
-                            <a:schemeClr val="tx1"/>
-                          </a:solidFill>
-                        </a:rPr>
-                        <a:t>Phase II; randomized trial</a:t>
-                      </a:r>
-                      <a:endParaRPr lang="en-US" sz="1600" dirty="0"/>
+                        <a:rPr lang="en-US" sz="1700" dirty="0">
+                          <a:solidFill>
+                            <a:schemeClr val="tx1"/>
+                          </a:solidFill>
+                        </a:rPr>
+                        <a:t>Phase II; then RCT</a:t>
+                      </a:r>
+                      <a:endParaRPr lang="en-US" sz="1700" dirty="0"/>
                     </a:p>
                   </a:txBody>
                   <a:tcPr marL="25400" marR="101600" marT="63500" marB="63500" anchor="ctr">
@@ -5907,28 +5907,28 @@
                         <a:buNone/>
                       </a:pPr>
                       <a:r>
-                        <a:rPr lang="en-US" sz="1600" dirty="0">
+                        <a:rPr lang="en-US" sz="1700" dirty="0">
                           <a:solidFill>
                             <a:schemeClr val="tx1"/>
                           </a:solidFill>
                         </a:rPr>
                         <a:t>12-month relapse 9.2%;</a:t>
                       </a:r>
-                      <a:endParaRPr lang="en-US" sz="1600" dirty="0"/>
-                    </a:p>
-                    <a:p>
-                      <a:pPr indent="0" marL="0">
-                        <a:buNone/>
-                      </a:pPr>
-                      <a:r>
-                        <a:rPr lang="en-US" sz="1600" dirty="0">
+                      <a:endParaRPr lang="en-US" sz="1700" dirty="0"/>
+                    </a:p>
+                    <a:p>
+                      <a:pPr indent="0" marL="0">
+                        <a:buNone/>
+                      </a:pPr>
+                      <a:r>
+                        <a:rPr lang="en-US" sz="1700" dirty="0">
                           <a:solidFill>
                             <a:schemeClr val="tx1"/>
                           </a:solidFill>
                         </a:rPr>
                         <a:t>no survival benefit</a:t>
                       </a:r>
-                      <a:endParaRPr lang="en-US" sz="1600" dirty="0"/>
+                      <a:endParaRPr lang="en-US" sz="1700" dirty="0"/>
                     </a:p>
                   </a:txBody>
                   <a:tcPr marL="25400" marR="101600" marT="63500" marB="63500" anchor="ctr">
@@ -5963,14 +5963,14 @@
                         <a:buNone/>
                       </a:pPr>
                       <a:r>
-                        <a:rPr lang="en-US" sz="1600" dirty="0">
+                        <a:rPr lang="en-US" sz="1700" dirty="0">
                           <a:solidFill>
                             <a:schemeClr val="tx1"/>
                           </a:solidFill>
                         </a:rPr>
                         <a:t>Sorafenib (Burchert 2020, SORMAIN)</a:t>
                       </a:r>
-                      <a:endParaRPr lang="en-US" sz="1600" dirty="0"/>
+                      <a:endParaRPr lang="en-US" sz="1700" dirty="0"/>
                     </a:p>
                   </a:txBody>
                   <a:tcPr marL="25400" marR="101600" marT="63500" marB="63500" anchor="ctr">
@@ -6003,14 +6003,14 @@
                         <a:buNone/>
                       </a:pPr>
                       <a:r>
-                        <a:rPr lang="en-US" sz="1600" dirty="0">
+                        <a:rPr lang="en-US" sz="1700" dirty="0">
                           <a:solidFill>
                             <a:schemeClr val="tx1"/>
                           </a:solidFill>
                         </a:rPr>
                         <a:t>Randomized</a:t>
                       </a:r>
-                      <a:endParaRPr lang="en-US" sz="1600" dirty="0"/>
+                      <a:endParaRPr lang="en-US" sz="1700" dirty="0"/>
                     </a:p>
                   </a:txBody>
                   <a:tcPr marL="25400" marR="101600" marT="63500" marB="63500" anchor="ctr">
@@ -6043,14 +6043,14 @@
                         <a:buNone/>
                       </a:pPr>
                       <a:r>
-                        <a:rPr lang="en-US" sz="1600" dirty="0">
+                        <a:rPr lang="en-US" sz="1700" dirty="0">
                           <a:solidFill>
                             <a:schemeClr val="tx1"/>
                           </a:solidFill>
                         </a:rPr>
                         <a:t>Better EFS and OS</a:t>
                       </a:r>
-                      <a:endParaRPr lang="en-US" sz="1600" dirty="0"/>
+                      <a:endParaRPr lang="en-US" sz="1700" dirty="0"/>
                     </a:p>
                   </a:txBody>
                   <a:tcPr marL="25400" marR="101600" marT="63500" marB="63500" anchor="ctr">
@@ -6085,14 +6085,14 @@
                         <a:buNone/>
                       </a:pPr>
                       <a:r>
-                        <a:rPr lang="en-US" sz="1600" dirty="0">
+                        <a:rPr lang="en-US" sz="1700" dirty="0">
                           <a:solidFill>
                             <a:schemeClr val="tx1"/>
                           </a:solidFill>
                         </a:rPr>
                         <a:t>Sorafenib (Xuan 2020)</a:t>
                       </a:r>
-                      <a:endParaRPr lang="en-US" sz="1600" dirty="0"/>
+                      <a:endParaRPr lang="en-US" sz="1700" dirty="0"/>
                     </a:p>
                   </a:txBody>
                   <a:tcPr marL="25400" marR="101600" marT="63500" marB="63500" anchor="ctr">
@@ -6125,14 +6125,14 @@
                         <a:buNone/>
                       </a:pPr>
                       <a:r>
-                        <a:rPr lang="en-US" sz="1600" dirty="0">
+                        <a:rPr lang="en-US" sz="1700" dirty="0">
                           <a:solidFill>
                             <a:schemeClr val="tx1"/>
                           </a:solidFill>
                         </a:rPr>
                         <a:t>Randomized phase III</a:t>
                       </a:r>
-                      <a:endParaRPr lang="en-US" sz="1600" dirty="0"/>
+                      <a:endParaRPr lang="en-US" sz="1700" dirty="0"/>
                     </a:p>
                   </a:txBody>
                   <a:tcPr marL="25400" marR="101600" marT="63500" marB="63500" anchor="ctr">
@@ -6165,14 +6165,14 @@
                         <a:buNone/>
                       </a:pPr>
                       <a:r>
-                        <a:rPr lang="en-US" sz="1600" dirty="0">
+                        <a:rPr lang="en-US" sz="1700" dirty="0">
                           <a:solidFill>
                             <a:schemeClr val="tx1"/>
                           </a:solidFill>
                         </a:rPr>
                         <a:t>Better EFS and OS</a:t>
                       </a:r>
-                      <a:endParaRPr lang="en-US" sz="1600" dirty="0"/>
+                      <a:endParaRPr lang="en-US" sz="1700" dirty="0"/>
                     </a:p>
                   </a:txBody>
                   <a:tcPr marL="25400" marR="101600" marT="63500" marB="63500" anchor="ctr">
@@ -6207,14 +6207,14 @@
                         <a:buNone/>
                       </a:pPr>
                       <a:r>
-                        <a:rPr lang="en-US" sz="1600" dirty="0">
+                        <a:rPr lang="en-US" sz="1700" dirty="0">
                           <a:solidFill>
                             <a:schemeClr val="tx1"/>
                           </a:solidFill>
                         </a:rPr>
                         <a:t>TKI meta-analysis (Gagelmann 2021)</a:t>
                       </a:r>
-                      <a:endParaRPr lang="en-US" sz="1600" dirty="0"/>
+                      <a:endParaRPr lang="en-US" sz="1700" dirty="0"/>
                     </a:p>
                   </a:txBody>
                   <a:tcPr marL="25400" marR="101600" marT="63500" marB="63500" anchor="ctr">
@@ -6247,14 +6247,14 @@
                         <a:buNone/>
                       </a:pPr>
                       <a:r>
-                        <a:rPr lang="en-US" sz="1600" dirty="0">
+                        <a:rPr lang="en-US" sz="1700" dirty="0">
                           <a:solidFill>
                             <a:schemeClr val="tx1"/>
                           </a:solidFill>
                         </a:rPr>
                         <a:t>Post-allograft TKI</a:t>
                       </a:r>
-                      <a:endParaRPr lang="en-US" sz="1600" dirty="0"/>
+                      <a:endParaRPr lang="en-US" sz="1700" dirty="0"/>
                     </a:p>
                   </a:txBody>
                   <a:tcPr marL="25400" marR="101600" marT="63500" marB="63500" anchor="ctr">
@@ -6287,14 +6287,14 @@
                         <a:buNone/>
                       </a:pPr>
                       <a:r>
-                        <a:rPr lang="en-US" sz="1600" dirty="0">
+                        <a:rPr lang="en-US" sz="1700" dirty="0">
                           <a:solidFill>
                             <a:schemeClr val="tx1"/>
                           </a:solidFill>
                         </a:rPr>
                         <a:t>Clear benefit, favouring sorafenib</a:t>
                       </a:r>
-                      <a:endParaRPr lang="en-US" sz="1600" dirty="0"/>
+                      <a:endParaRPr lang="en-US" sz="1700" dirty="0"/>
                     </a:p>
                   </a:txBody>
                   <a:tcPr marL="25400" marR="101600" marT="63500" marB="63500" anchor="ctr">
@@ -6329,14 +6329,14 @@
                         <a:buNone/>
                       </a:pPr>
                       <a:r>
-                        <a:rPr lang="en-US" sz="1600" dirty="0">
+                        <a:rPr lang="en-US" sz="1700" dirty="0">
                           <a:solidFill>
                             <a:schemeClr val="tx1"/>
                           </a:solidFill>
                         </a:rPr>
                         <a:t>Sorafenib at relapse</a:t>
                       </a:r>
-                      <a:endParaRPr lang="en-US" sz="1600" dirty="0"/>
+                      <a:endParaRPr lang="en-US" sz="1700" dirty="0"/>
                     </a:p>
                   </a:txBody>
                   <a:tcPr marL="25400" marR="101600" marT="63500" marB="63500" anchor="ctr">
@@ -6369,14 +6369,14 @@
                         <a:buNone/>
                       </a:pPr>
                       <a:r>
-                        <a:rPr lang="en-US" sz="1600" dirty="0">
+                        <a:rPr lang="en-US" sz="1700" dirty="0">
                           <a:solidFill>
                             <a:schemeClr val="tx1"/>
                           </a:solidFill>
                         </a:rPr>
                         <a:t>Retrospective</a:t>
                       </a:r>
-                      <a:endParaRPr lang="en-US" sz="1600" dirty="0"/>
+                      <a:endParaRPr lang="en-US" sz="1700" dirty="0"/>
                     </a:p>
                   </a:txBody>
                   <a:tcPr marL="25400" marR="101600" marT="63500" marB="63500" anchor="ctr">
@@ -6409,14 +6409,14 @@
                         <a:buNone/>
                       </a:pPr>
                       <a:r>
-                        <a:rPr lang="en-US" sz="1600" dirty="0">
-                          <a:solidFill>
-                            <a:schemeClr val="tx1"/>
-                          </a:solidFill>
-                        </a:rPr>
-                        <a:t>Long CRs; with DLI better than DLI alone</a:t>
-                      </a:r>
-                      <a:endParaRPr lang="en-US" sz="1600" dirty="0"/>
+                        <a:rPr lang="en-US" sz="1700" dirty="0">
+                          <a:solidFill>
+                            <a:schemeClr val="tx1"/>
+                          </a:solidFill>
+                        </a:rPr>
+                        <a:t>Durable CR; +DLI beats DLI alone</a:t>
+                      </a:r>
+                      <a:endParaRPr lang="en-US" sz="1700" dirty="0"/>
                     </a:p>
                   </a:txBody>
                   <a:tcPr marL="25400" marR="101600" marT="63500" marB="63500" anchor="ctr">
@@ -6475,7 +6475,7 @@
                   <a:schemeClr val="tx1"/>
                 </a:solidFill>
               </a:rPr>
-              <a:t>Sorafenib induces IL-15 in FLT3-ITD cells and boosts GVL (Mathew 2018). Quizartinib, gilteritinib, crenolanib: in trials.</a:t>
+              <a:t>Sorafenib induces IL-15 and boosts GVL (Mathew 2018). Quizartinib, gilteritinib, crenolanib: in trials.</a:t>
             </a:r>
             <a:endParaRPr lang="en-US" sz="1600" dirty="0"/>
           </a:p>
@@ -6702,14 +6702,14 @@
                         <a:buNone/>
                       </a:pPr>
                       <a:r>
-                        <a:rPr lang="en-US" sz="1600" b="1" dirty="0">
+                        <a:rPr lang="en-US" sz="1700" b="1" dirty="0">
                           <a:solidFill>
                             <a:schemeClr val="tx1"/>
                           </a:solidFill>
                         </a:rPr>
                         <a:t>Setting</a:t>
                       </a:r>
-                      <a:endParaRPr lang="en-US" sz="1600" dirty="0"/>
+                      <a:endParaRPr lang="en-US" sz="1700" dirty="0"/>
                     </a:p>
                   </a:txBody>
                   <a:tcPr marL="25400" marR="101600" marT="63500" marB="63500" anchor="ctr">
@@ -6748,14 +6748,14 @@
                         <a:buNone/>
                       </a:pPr>
                       <a:r>
-                        <a:rPr lang="en-US" sz="1600" b="1" dirty="0">
+                        <a:rPr lang="en-US" sz="1700" b="1" dirty="0">
                           <a:solidFill>
                             <a:schemeClr val="tx1"/>
                           </a:solidFill>
                         </a:rPr>
                         <a:t>Evidence</a:t>
                       </a:r>
-                      <a:endParaRPr lang="en-US" sz="1600" dirty="0"/>
+                      <a:endParaRPr lang="en-US" sz="1700" dirty="0"/>
                     </a:p>
                   </a:txBody>
                   <a:tcPr marL="25400" marR="101600" marT="63500" marB="63500" anchor="ctr">
@@ -6794,14 +6794,14 @@
                         <a:buNone/>
                       </a:pPr>
                       <a:r>
-                        <a:rPr lang="en-US" sz="1600" b="1" dirty="0">
+                        <a:rPr lang="en-US" sz="1700" b="1" dirty="0">
                           <a:solidFill>
                             <a:schemeClr val="tx1"/>
                           </a:solidFill>
                         </a:rPr>
                         <a:t>Result</a:t>
                       </a:r>
-                      <a:endParaRPr lang="en-US" sz="1600" dirty="0"/>
+                      <a:endParaRPr lang="en-US" sz="1700" dirty="0"/>
                     </a:p>
                   </a:txBody>
                   <a:tcPr marL="25400" marR="101600" marT="63500" marB="63500" anchor="ctr">
@@ -6842,14 +6842,14 @@
                         <a:buNone/>
                       </a:pPr>
                       <a:r>
-                        <a:rPr lang="en-US" sz="1600" dirty="0">
+                        <a:rPr lang="en-US" sz="1700" dirty="0">
                           <a:solidFill>
                             <a:schemeClr val="tx1"/>
                           </a:solidFill>
                         </a:rPr>
                         <a:t>CML relapse after allograft</a:t>
                       </a:r>
-                      <a:endParaRPr lang="en-US" sz="1600" dirty="0"/>
+                      <a:endParaRPr lang="en-US" sz="1700" dirty="0"/>
                     </a:p>
                   </a:txBody>
                   <a:tcPr marL="25400" marR="101600" marT="63500" marB="63500" anchor="ctr">
@@ -6882,14 +6882,14 @@
                         <a:buNone/>
                       </a:pPr>
                       <a:r>
-                        <a:rPr lang="en-US" sz="1600" dirty="0">
+                        <a:rPr lang="en-US" sz="1700" dirty="0">
                           <a:solidFill>
                             <a:schemeClr val="tx1"/>
                           </a:solidFill>
                         </a:rPr>
                         <a:t>Imatinib</a:t>
                       </a:r>
-                      <a:endParaRPr lang="en-US" sz="1600" dirty="0"/>
+                      <a:endParaRPr lang="en-US" sz="1700" dirty="0"/>
                     </a:p>
                   </a:txBody>
                   <a:tcPr marL="25400" marR="101600" marT="63500" marB="63500" anchor="ctr">
@@ -6922,14 +6922,14 @@
                         <a:buNone/>
                       </a:pPr>
                       <a:r>
-                        <a:rPr lang="en-US" sz="1600" dirty="0">
+                        <a:rPr lang="en-US" sz="1700" dirty="0">
                           <a:solidFill>
                             <a:schemeClr val="tx1"/>
                           </a:solidFill>
                         </a:rPr>
                         <a:t>&gt; 60% molecular remission</a:t>
                       </a:r>
-                      <a:endParaRPr lang="en-US" sz="1600" dirty="0"/>
+                      <a:endParaRPr lang="en-US" sz="1700" dirty="0"/>
                     </a:p>
                   </a:txBody>
                   <a:tcPr marL="25400" marR="101600" marT="63500" marB="63500" anchor="ctr">
@@ -6964,14 +6964,14 @@
                         <a:buNone/>
                       </a:pPr>
                       <a:r>
-                        <a:rPr lang="en-US" sz="1600" dirty="0">
+                        <a:rPr lang="en-US" sz="1700" dirty="0">
                           <a:solidFill>
                             <a:schemeClr val="tx1"/>
                           </a:solidFill>
                         </a:rPr>
                         <a:t>CML maintenance</a:t>
                       </a:r>
-                      <a:endParaRPr lang="en-US" sz="1600" dirty="0"/>
+                      <a:endParaRPr lang="en-US" sz="1700" dirty="0"/>
                     </a:p>
                   </a:txBody>
                   <a:tcPr marL="25400" marR="101600" marT="63500" marB="63500" anchor="ctr">
@@ -7004,14 +7004,14 @@
                         <a:buNone/>
                       </a:pPr>
                       <a:r>
-                        <a:rPr lang="en-US" sz="1600" dirty="0">
+                        <a:rPr lang="en-US" sz="1700" dirty="0">
                           <a:solidFill>
                             <a:schemeClr val="tx1"/>
                           </a:solidFill>
                         </a:rPr>
                         <a:t>2nd-generation TKI, small studies</a:t>
                       </a:r>
-                      <a:endParaRPr lang="en-US" sz="1600" dirty="0"/>
+                      <a:endParaRPr lang="en-US" sz="1700" dirty="0"/>
                     </a:p>
                   </a:txBody>
                   <a:tcPr marL="25400" marR="101600" marT="63500" marB="63500" anchor="ctr">
@@ -7044,14 +7044,14 @@
                         <a:buNone/>
                       </a:pPr>
                       <a:r>
-                        <a:rPr lang="en-US" sz="1600" dirty="0">
+                        <a:rPr lang="en-US" sz="1700" dirty="0">
                           <a:solidFill>
                             <a:schemeClr val="tx1"/>
                           </a:solidFill>
                         </a:rPr>
                         <a:t>Successful; blast phase may gain</a:t>
                       </a:r>
-                      <a:endParaRPr lang="en-US" sz="1600" dirty="0"/>
+                      <a:endParaRPr lang="en-US" sz="1700" dirty="0"/>
                     </a:p>
                   </a:txBody>
                   <a:tcPr marL="25400" marR="101600" marT="63500" marB="63500" anchor="ctr">
@@ -7086,14 +7086,14 @@
                         <a:buNone/>
                       </a:pPr>
                       <a:r>
-                        <a:rPr lang="en-US" sz="1600" dirty="0">
+                        <a:rPr lang="en-US" sz="1700" dirty="0">
                           <a:solidFill>
                             <a:schemeClr val="tx1"/>
                           </a:solidFill>
                         </a:rPr>
                         <a:t>Ph+ ALL, CIBMTR</a:t>
                       </a:r>
-                      <a:endParaRPr lang="en-US" sz="1600" dirty="0"/>
+                      <a:endParaRPr lang="en-US" sz="1700" dirty="0"/>
                     </a:p>
                   </a:txBody>
                   <a:tcPr marL="25400" marR="101600" marT="63500" marB="63500" anchor="ctr">
@@ -7126,14 +7126,14 @@
                         <a:buNone/>
                       </a:pPr>
                       <a:r>
-                        <a:rPr lang="en-US" sz="1600" dirty="0">
+                        <a:rPr lang="en-US" sz="1700" dirty="0">
                           <a:solidFill>
                             <a:schemeClr val="tx1"/>
                           </a:solidFill>
                         </a:rPr>
                         <a:t>Post-HCT TKI vs none</a:t>
                       </a:r>
-                      <a:endParaRPr lang="en-US" sz="1600" dirty="0"/>
+                      <a:endParaRPr lang="en-US" sz="1700" dirty="0"/>
                     </a:p>
                   </a:txBody>
                   <a:tcPr marL="25400" marR="101600" marT="63500" marB="63500" anchor="ctr">
@@ -7166,14 +7166,14 @@
                         <a:buNone/>
                       </a:pPr>
                       <a:r>
-                        <a:rPr lang="en-US" sz="1600" dirty="0">
+                        <a:rPr lang="en-US" sz="1700" dirty="0">
                           <a:solidFill>
                             <a:schemeClr val="tx1"/>
                           </a:solidFill>
                         </a:rPr>
                         <a:t>No difference in 3-year relapse</a:t>
                       </a:r>
-                      <a:endParaRPr lang="en-US" sz="1600" dirty="0"/>
+                      <a:endParaRPr lang="en-US" sz="1700" dirty="0"/>
                     </a:p>
                   </a:txBody>
                   <a:tcPr marL="25400" marR="101600" marT="63500" marB="63500" anchor="ctr">
@@ -7208,14 +7208,14 @@
                         <a:buNone/>
                       </a:pPr>
                       <a:r>
-                        <a:rPr lang="en-US" sz="1600" dirty="0">
+                        <a:rPr lang="en-US" sz="1700" dirty="0">
                           <a:solidFill>
                             <a:schemeClr val="tx1"/>
                           </a:solidFill>
                         </a:rPr>
                         <a:t>Ph+ ALL, EBMT</a:t>
                       </a:r>
-                      <a:endParaRPr lang="en-US" sz="1600" dirty="0"/>
+                      <a:endParaRPr lang="en-US" sz="1700" dirty="0"/>
                     </a:p>
                   </a:txBody>
                   <a:tcPr marL="25400" marR="101600" marT="63500" marB="63500" anchor="ctr">
@@ -7248,14 +7248,14 @@
                         <a:buNone/>
                       </a:pPr>
                       <a:r>
-                        <a:rPr lang="en-US" sz="1600" dirty="0">
+                        <a:rPr lang="en-US" sz="1700" dirty="0">
                           <a:solidFill>
                             <a:schemeClr val="tx1"/>
                           </a:solidFill>
                         </a:rPr>
                         <a:t>Post-HCT TKI vs none</a:t>
                       </a:r>
-                      <a:endParaRPr lang="en-US" sz="1600" dirty="0"/>
+                      <a:endParaRPr lang="en-US" sz="1700" dirty="0"/>
                     </a:p>
                   </a:txBody>
                   <a:tcPr marL="25400" marR="101600" marT="63500" marB="63500" anchor="ctr">
@@ -7288,14 +7288,14 @@
                         <a:buNone/>
                       </a:pPr>
                       <a:r>
-                        <a:rPr lang="en-US" sz="1600" dirty="0">
+                        <a:rPr lang="en-US" sz="1700" dirty="0">
                           <a:solidFill>
                             <a:schemeClr val="tx1"/>
                           </a:solidFill>
                         </a:rPr>
                         <a:t>Lower relapse, better LFS</a:t>
                       </a:r>
-                      <a:endParaRPr lang="en-US" sz="1600" dirty="0"/>
+                      <a:endParaRPr lang="en-US" sz="1700" dirty="0"/>
                     </a:p>
                   </a:txBody>
                   <a:tcPr marL="25400" marR="101600" marT="63500" marB="63500" anchor="ctr">
@@ -7330,14 +7330,14 @@
                         <a:buNone/>
                       </a:pPr>
                       <a:r>
-                        <a:rPr lang="en-US" sz="1600" dirty="0">
+                        <a:rPr lang="en-US" sz="1700" dirty="0">
                           <a:solidFill>
                             <a:schemeClr val="tx1"/>
                           </a:solidFill>
                         </a:rPr>
                         <a:t>Ph+ ALL (Pfeifer 2013)</a:t>
                       </a:r>
-                      <a:endParaRPr lang="en-US" sz="1600" dirty="0"/>
+                      <a:endParaRPr lang="en-US" sz="1700" dirty="0"/>
                     </a:p>
                   </a:txBody>
                   <a:tcPr marL="25400" marR="101600" marT="63500" marB="63500" anchor="ctr">
@@ -7370,28 +7370,28 @@
                         <a:buNone/>
                       </a:pPr>
                       <a:r>
-                        <a:rPr lang="en-US" sz="1600" dirty="0">
+                        <a:rPr lang="en-US" sz="1700" dirty="0">
                           <a:solidFill>
                             <a:schemeClr val="tx1"/>
                           </a:solidFill>
                         </a:rPr>
                         <a:t>Randomized: prophylactic vs</a:t>
                       </a:r>
-                      <a:endParaRPr lang="en-US" sz="1600" dirty="0"/>
-                    </a:p>
-                    <a:p>
-                      <a:pPr indent="0" marL="0">
-                        <a:buNone/>
-                      </a:pPr>
-                      <a:r>
-                        <a:rPr lang="en-US" sz="1600" dirty="0">
+                      <a:endParaRPr lang="en-US" sz="1700" dirty="0"/>
+                    </a:p>
+                    <a:p>
+                      <a:pPr indent="0" marL="0">
+                        <a:buNone/>
+                      </a:pPr>
+                      <a:r>
+                        <a:rPr lang="en-US" sz="1700" dirty="0">
                           <a:solidFill>
                             <a:schemeClr val="tx1"/>
                           </a:solidFill>
                         </a:rPr>
                         <a:t>MRD-triggered imatinib</a:t>
                       </a:r>
-                      <a:endParaRPr lang="en-US" sz="1600" dirty="0"/>
+                      <a:endParaRPr lang="en-US" sz="1700" dirty="0"/>
                     </a:p>
                   </a:txBody>
                   <a:tcPr marL="25400" marR="101600" marT="63500" marB="63500" anchor="ctr">
@@ -7424,14 +7424,14 @@
                         <a:buNone/>
                       </a:pPr>
                       <a:r>
-                        <a:rPr lang="en-US" sz="1600" dirty="0">
+                        <a:rPr lang="en-US" sz="1700" dirty="0">
                           <a:solidFill>
                             <a:schemeClr val="tx1"/>
                           </a:solidFill>
                         </a:rPr>
                         <a:t>No survival difference</a:t>
                       </a:r>
-                      <a:endParaRPr lang="en-US" sz="1600" dirty="0"/>
+                      <a:endParaRPr lang="en-US" sz="1700" dirty="0"/>
                     </a:p>
                   </a:txBody>
                   <a:tcPr marL="25400" marR="101600" marT="63500" marB="63500" anchor="ctr">
@@ -7466,14 +7466,14 @@
                         <a:buNone/>
                       </a:pPr>
                       <a:r>
-                        <a:rPr lang="en-US" sz="1600" dirty="0">
+                        <a:rPr lang="en-US" sz="1700" dirty="0">
                           <a:solidFill>
                             <a:schemeClr val="tx1"/>
                           </a:solidFill>
                         </a:rPr>
                         <a:t>EBMT position (Giebel 2016)</a:t>
                       </a:r>
-                      <a:endParaRPr lang="en-US" sz="1600" dirty="0"/>
+                      <a:endParaRPr lang="en-US" sz="1700" dirty="0"/>
                     </a:p>
                   </a:txBody>
                   <a:tcPr marL="25400" marR="101600" marT="63500" marB="63500" anchor="ctr">
@@ -7506,14 +7506,14 @@
                         <a:buNone/>
                       </a:pPr>
                       <a:r>
-                        <a:rPr lang="en-US" sz="1600" dirty="0">
+                        <a:rPr lang="en-US" sz="1700" dirty="0">
                           <a:solidFill>
                             <a:schemeClr val="tx1"/>
                           </a:solidFill>
                         </a:rPr>
                         <a:t>MRD-negative after allo-HCT</a:t>
                       </a:r>
-                      <a:endParaRPr lang="en-US" sz="1600" dirty="0"/>
+                      <a:endParaRPr lang="en-US" sz="1700" dirty="0"/>
                     </a:p>
                   </a:txBody>
                   <a:tcPr marL="25400" marR="101600" marT="63500" marB="63500" anchor="ctr">
@@ -7546,14 +7546,14 @@
                         <a:buNone/>
                       </a:pPr>
                       <a:r>
-                        <a:rPr lang="en-US" sz="1600" dirty="0">
+                        <a:rPr lang="en-US" sz="1700" dirty="0">
                           <a:solidFill>
                             <a:schemeClr val="tx1"/>
                           </a:solidFill>
                         </a:rPr>
                         <a:t>Prophylactic or pre-emptive TKI</a:t>
                       </a:r>
-                      <a:endParaRPr lang="en-US" sz="1600" dirty="0"/>
+                      <a:endParaRPr lang="en-US" sz="1700" dirty="0"/>
                     </a:p>
                   </a:txBody>
                   <a:tcPr marL="25400" marR="101600" marT="63500" marB="63500" anchor="ctr">
@@ -7839,14 +7839,14 @@
                         <a:buNone/>
                       </a:pPr>
                       <a:r>
-                        <a:rPr lang="en-US" sz="1600" b="1" dirty="0">
+                        <a:rPr lang="en-US" sz="1700" b="1" dirty="0">
                           <a:solidFill>
                             <a:schemeClr val="tx1"/>
                           </a:solidFill>
                         </a:rPr>
                         <a:t>Setting</a:t>
                       </a:r>
-                      <a:endParaRPr lang="en-US" sz="1600" dirty="0"/>
+                      <a:endParaRPr lang="en-US" sz="1700" dirty="0"/>
                     </a:p>
                   </a:txBody>
                   <a:tcPr marL="25400" marR="101600" marT="63500" marB="63500" anchor="ctr">
@@ -7885,14 +7885,14 @@
                         <a:buNone/>
                       </a:pPr>
                       <a:r>
-                        <a:rPr lang="en-US" sz="1600" b="1" dirty="0">
+                        <a:rPr lang="en-US" sz="1700" b="1" dirty="0">
                           <a:solidFill>
                             <a:schemeClr val="tx1"/>
                           </a:solidFill>
                         </a:rPr>
                         <a:t>Regimen</a:t>
                       </a:r>
-                      <a:endParaRPr lang="en-US" sz="1600" dirty="0"/>
+                      <a:endParaRPr lang="en-US" sz="1700" dirty="0"/>
                     </a:p>
                   </a:txBody>
                   <a:tcPr marL="25400" marR="101600" marT="63500" marB="63500" anchor="ctr">
@@ -7931,14 +7931,14 @@
                         <a:buNone/>
                       </a:pPr>
                       <a:r>
-                        <a:rPr lang="en-US" sz="1600" b="1" dirty="0">
+                        <a:rPr lang="en-US" sz="1700" b="1" dirty="0">
                           <a:solidFill>
                             <a:schemeClr val="tx1"/>
                           </a:solidFill>
                         </a:rPr>
                         <a:t>Result</a:t>
                       </a:r>
-                      <a:endParaRPr lang="en-US" sz="1600" dirty="0"/>
+                      <a:endParaRPr lang="en-US" sz="1700" dirty="0"/>
                     </a:p>
                   </a:txBody>
                   <a:tcPr marL="25400" marR="101600" marT="63500" marB="63500" anchor="ctr">
@@ -7979,28 +7979,28 @@
                         <a:buNone/>
                       </a:pPr>
                       <a:r>
-                        <a:rPr lang="en-US" sz="1600" dirty="0">
+                        <a:rPr lang="en-US" sz="1700" dirty="0">
                           <a:solidFill>
                             <a:schemeClr val="tx1"/>
                           </a:solidFill>
                         </a:rPr>
                         <a:t>Pre-emptive, MRD+ MDS/AML</a:t>
                       </a:r>
-                      <a:endParaRPr lang="en-US" sz="1600" dirty="0"/>
-                    </a:p>
-                    <a:p>
-                      <a:pPr indent="0" marL="0">
-                        <a:buNone/>
-                      </a:pPr>
-                      <a:r>
-                        <a:rPr lang="en-US" sz="1600" dirty="0">
+                      <a:endParaRPr lang="en-US" sz="1700" dirty="0"/>
+                    </a:p>
+                    <a:p>
+                      <a:pPr indent="0" marL="0">
+                        <a:buNone/>
+                      </a:pPr>
+                      <a:r>
+                        <a:rPr lang="en-US" sz="1700" dirty="0">
                           <a:solidFill>
                             <a:schemeClr val="tx1"/>
                           </a:solidFill>
                         </a:rPr>
                         <a:t>(RELAZA2)</a:t>
                       </a:r>
-                      <a:endParaRPr lang="en-US" sz="1600" dirty="0"/>
+                      <a:endParaRPr lang="en-US" sz="1700" dirty="0"/>
                     </a:p>
                   </a:txBody>
                   <a:tcPr marL="25400" marR="101600" marT="63500" marB="63500" anchor="ctr">
@@ -8033,14 +8033,14 @@
                         <a:buNone/>
                       </a:pPr>
                       <a:r>
-                        <a:rPr lang="en-US" sz="1600" dirty="0">
+                        <a:rPr lang="en-US" sz="1700" dirty="0">
                           <a:solidFill>
                             <a:schemeClr val="tx1"/>
                           </a:solidFill>
                         </a:rPr>
                         <a:t>Azacitidine</a:t>
                       </a:r>
-                      <a:endParaRPr lang="en-US" sz="1600" dirty="0"/>
+                      <a:endParaRPr lang="en-US" sz="1700" dirty="0"/>
                     </a:p>
                   </a:txBody>
                   <a:tcPr marL="25400" marR="101600" marT="63500" marB="63500" anchor="ctr">
@@ -8073,28 +8073,28 @@
                         <a:buNone/>
                       </a:pPr>
                       <a:r>
-                        <a:rPr lang="en-US" sz="1600" dirty="0">
+                        <a:rPr lang="en-US" sz="1700" dirty="0">
                           <a:solidFill>
                             <a:schemeClr val="tx1"/>
                           </a:solidFill>
                         </a:rPr>
                         <a:t>Prevents or delays</a:t>
                       </a:r>
-                      <a:endParaRPr lang="en-US" sz="1600" dirty="0"/>
-                    </a:p>
-                    <a:p>
-                      <a:pPr indent="0" marL="0">
-                        <a:buNone/>
-                      </a:pPr>
-                      <a:r>
-                        <a:rPr lang="en-US" sz="1600" dirty="0">
+                      <a:endParaRPr lang="en-US" sz="1700" dirty="0"/>
+                    </a:p>
+                    <a:p>
+                      <a:pPr indent="0" marL="0">
+                        <a:buNone/>
+                      </a:pPr>
+                      <a:r>
+                        <a:rPr lang="en-US" sz="1700" dirty="0">
                           <a:solidFill>
                             <a:schemeClr val="tx1"/>
                           </a:solidFill>
                         </a:rPr>
                         <a:t>haematological relapse</a:t>
                       </a:r>
-                      <a:endParaRPr lang="en-US" sz="1600" dirty="0"/>
+                      <a:endParaRPr lang="en-US" sz="1700" dirty="0"/>
                     </a:p>
                   </a:txBody>
                   <a:tcPr marL="25400" marR="101600" marT="63500" marB="63500" anchor="ctr">
@@ -8129,14 +8129,14 @@
                         <a:buNone/>
                       </a:pPr>
                       <a:r>
-                        <a:rPr lang="en-US" sz="1600" dirty="0">
+                        <a:rPr lang="en-US" sz="1700" dirty="0">
                           <a:solidFill>
                             <a:schemeClr val="tx1"/>
                           </a:solidFill>
                         </a:rPr>
                         <a:t>Falling donor chimerism</a:t>
                       </a:r>
-                      <a:endParaRPr lang="en-US" sz="1600" dirty="0"/>
+                      <a:endParaRPr lang="en-US" sz="1700" dirty="0"/>
                     </a:p>
                   </a:txBody>
                   <a:tcPr marL="25400" marR="101600" marT="63500" marB="63500" anchor="ctr">
@@ -8169,14 +8169,14 @@
                         <a:buNone/>
                       </a:pPr>
                       <a:r>
-                        <a:rPr lang="en-US" sz="1600" dirty="0">
+                        <a:rPr lang="en-US" sz="1700" dirty="0">
                           <a:solidFill>
                             <a:schemeClr val="tx1"/>
                           </a:solidFill>
                         </a:rPr>
                         <a:t>Azacitidine</a:t>
                       </a:r>
-                      <a:endParaRPr lang="en-US" sz="1600" dirty="0"/>
+                      <a:endParaRPr lang="en-US" sz="1700" dirty="0"/>
                     </a:p>
                   </a:txBody>
                   <a:tcPr marL="25400" marR="101600" marT="63500" marB="63500" anchor="ctr">
@@ -8209,14 +8209,14 @@
                         <a:buNone/>
                       </a:pPr>
                       <a:r>
-                        <a:rPr lang="en-US" sz="1600" dirty="0">
+                        <a:rPr lang="en-US" sz="1700" dirty="0">
                           <a:solidFill>
                             <a:schemeClr val="tx1"/>
                           </a:solidFill>
                         </a:rPr>
                         <a:t>Can restore full donor chimerism</a:t>
                       </a:r>
-                      <a:endParaRPr lang="en-US" sz="1600" dirty="0"/>
+                      <a:endParaRPr lang="en-US" sz="1700" dirty="0"/>
                     </a:p>
                   </a:txBody>
                   <a:tcPr marL="25400" marR="101600" marT="63500" marB="63500" anchor="ctr">
@@ -8251,14 +8251,14 @@
                         <a:buNone/>
                       </a:pPr>
                       <a:r>
-                        <a:rPr lang="en-US" sz="1600" dirty="0">
+                        <a:rPr lang="en-US" sz="1700" dirty="0">
                           <a:solidFill>
                             <a:schemeClr val="tx1"/>
                           </a:solidFill>
                         </a:rPr>
                         <a:t>Overt relapse, EBMT study</a:t>
                       </a:r>
-                      <a:endParaRPr lang="en-US" sz="1600" dirty="0"/>
+                      <a:endParaRPr lang="en-US" sz="1700" dirty="0"/>
                     </a:p>
                   </a:txBody>
                   <a:tcPr marL="25400" marR="101600" marT="63500" marB="63500" anchor="ctr">
@@ -8291,14 +8291,14 @@
                         <a:buNone/>
                       </a:pPr>
                       <a:r>
-                        <a:rPr lang="en-US" sz="1600" dirty="0">
+                        <a:rPr lang="en-US" sz="1700" dirty="0">
                           <a:solidFill>
                             <a:schemeClr val="tx1"/>
                           </a:solidFill>
                         </a:rPr>
                         <a:t>Azacitidine ± DLI</a:t>
                       </a:r>
-                      <a:endParaRPr lang="en-US" sz="1600" dirty="0"/>
+                      <a:endParaRPr lang="en-US" sz="1700" dirty="0"/>
                     </a:p>
                   </a:txBody>
                   <a:tcPr marL="25400" marR="101600" marT="63500" marB="63500" anchor="ctr">
@@ -8331,28 +8331,28 @@
                         <a:buNone/>
                       </a:pPr>
                       <a:r>
-                        <a:rPr lang="en-US" sz="1600" dirty="0">
+                        <a:rPr lang="en-US" sz="1700" dirty="0">
                           <a:solidFill>
                             <a:schemeClr val="tx1"/>
                           </a:solidFill>
                         </a:rPr>
                         <a:t>ORR 25%, CR 15%, 2-year OS 12%;</a:t>
                       </a:r>
-                      <a:endParaRPr lang="en-US" sz="1600" dirty="0"/>
-                    </a:p>
-                    <a:p>
-                      <a:pPr indent="0" marL="0">
-                        <a:buNone/>
-                      </a:pPr>
-                      <a:r>
-                        <a:rPr lang="en-US" sz="1600" dirty="0">
+                      <a:endParaRPr lang="en-US" sz="1700" dirty="0"/>
+                    </a:p>
+                    <a:p>
+                      <a:pPr indent="0" marL="0">
+                        <a:buNone/>
+                      </a:pPr>
+                      <a:r>
+                        <a:rPr lang="en-US" sz="1700" dirty="0">
                           <a:solidFill>
                             <a:schemeClr val="tx1"/>
                           </a:solidFill>
                         </a:rPr>
                         <a:t>DLI added nothing</a:t>
                       </a:r>
-                      <a:endParaRPr lang="en-US" sz="1600" dirty="0"/>
+                      <a:endParaRPr lang="en-US" sz="1700" dirty="0"/>
                     </a:p>
                   </a:txBody>
                   <a:tcPr marL="25400" marR="101600" marT="63500" marB="63500" anchor="ctr">
@@ -8387,14 +8387,14 @@
                         <a:buNone/>
                       </a:pPr>
                       <a:r>
-                        <a:rPr lang="en-US" sz="1600" dirty="0">
+                        <a:rPr lang="en-US" sz="1700" dirty="0">
                           <a:solidFill>
                             <a:schemeClr val="tx1"/>
                           </a:solidFill>
                         </a:rPr>
                         <a:t>Overt relapse, other series</a:t>
                       </a:r>
-                      <a:endParaRPr lang="en-US" sz="1600" dirty="0"/>
+                      <a:endParaRPr lang="en-US" sz="1700" dirty="0"/>
                     </a:p>
                   </a:txBody>
                   <a:tcPr marL="25400" marR="101600" marT="63500" marB="63500" anchor="ctr">
@@ -8427,14 +8427,14 @@
                         <a:buNone/>
                       </a:pPr>
                       <a:r>
-                        <a:rPr lang="en-US" sz="1600" dirty="0">
+                        <a:rPr lang="en-US" sz="1700" dirty="0">
                           <a:solidFill>
                             <a:schemeClr val="tx1"/>
                           </a:solidFill>
                         </a:rPr>
                         <a:t>Aza or decitabine ± DLI</a:t>
                       </a:r>
-                      <a:endParaRPr lang="en-US" sz="1600" dirty="0"/>
+                      <a:endParaRPr lang="en-US" sz="1700" dirty="0"/>
                     </a:p>
                   </a:txBody>
                   <a:tcPr marL="25400" marR="101600" marT="63500" marB="63500" anchor="ctr">
@@ -8467,14 +8467,14 @@
                         <a:buNone/>
                       </a:pPr>
                       <a:r>
-                        <a:rPr lang="en-US" sz="1600" dirty="0">
+                        <a:rPr lang="en-US" sz="1700" dirty="0">
                           <a:solidFill>
                             <a:schemeClr val="tx1"/>
                           </a:solidFill>
                         </a:rPr>
                         <a:t>Up to 28% CR, some durable</a:t>
                       </a:r>
-                      <a:endParaRPr lang="en-US" sz="1600" dirty="0"/>
+                      <a:endParaRPr lang="en-US" sz="1700" dirty="0"/>
                     </a:p>
                   </a:txBody>
                   <a:tcPr marL="25400" marR="101600" marT="63500" marB="63500" anchor="ctr">
@@ -8509,14 +8509,14 @@
                         <a:buNone/>
                       </a:pPr>
                       <a:r>
-                        <a:rPr lang="en-US" sz="1600" dirty="0">
+                        <a:rPr lang="en-US" sz="1700" dirty="0">
                           <a:solidFill>
                             <a:schemeClr val="tx1"/>
                           </a:solidFill>
                         </a:rPr>
                         <a:t>Prophylaxis (Oran 2020)</a:t>
                       </a:r>
-                      <a:endParaRPr lang="en-US" sz="1600" dirty="0"/>
+                      <a:endParaRPr lang="en-US" sz="1700" dirty="0"/>
                     </a:p>
                   </a:txBody>
                   <a:tcPr marL="25400" marR="101600" marT="63500" marB="63500" anchor="ctr">
@@ -8549,14 +8549,14 @@
                         <a:buNone/>
                       </a:pPr>
                       <a:r>
-                        <a:rPr lang="en-US" sz="1600" dirty="0">
+                        <a:rPr lang="en-US" sz="1700" dirty="0">
                           <a:solidFill>
                             <a:schemeClr val="tx1"/>
                           </a:solidFill>
                         </a:rPr>
                         <a:t>Azacitidine vs observation</a:t>
                       </a:r>
-                      <a:endParaRPr lang="en-US" sz="1600" dirty="0"/>
+                      <a:endParaRPr lang="en-US" sz="1700" dirty="0"/>
                     </a:p>
                   </a:txBody>
                   <a:tcPr marL="25400" marR="101600" marT="63500" marB="63500" anchor="ctr">
@@ -8589,14 +8589,14 @@
                         <a:buNone/>
                       </a:pPr>
                       <a:r>
-                        <a:rPr lang="en-US" sz="1600" dirty="0">
+                        <a:rPr lang="en-US" sz="1700" dirty="0">
                           <a:solidFill>
                             <a:schemeClr val="tx1"/>
                           </a:solidFill>
                         </a:rPr>
                         <a:t>No EFS or OS benefit</a:t>
                       </a:r>
-                      <a:endParaRPr lang="en-US" sz="1600" dirty="0"/>
+                      <a:endParaRPr lang="en-US" sz="1700" dirty="0"/>
                     </a:p>
                   </a:txBody>
                   <a:tcPr marL="25400" marR="101600" marT="63500" marB="63500" anchor="ctr">
@@ -8631,14 +8631,14 @@
                         <a:buNone/>
                       </a:pPr>
                       <a:r>
-                        <a:rPr lang="en-US" sz="1600" dirty="0">
+                        <a:rPr lang="en-US" sz="1700" dirty="0">
                           <a:solidFill>
                             <a:schemeClr val="tx1"/>
                           </a:solidFill>
                         </a:rPr>
                         <a:t>Prophylaxis (Gao 2020)</a:t>
                       </a:r>
-                      <a:endParaRPr lang="en-US" sz="1600" dirty="0"/>
+                      <a:endParaRPr lang="en-US" sz="1700" dirty="0"/>
                     </a:p>
                   </a:txBody>
                   <a:tcPr marL="25400" marR="101600" marT="63500" marB="63500" anchor="ctr">
@@ -8671,14 +8671,14 @@
                         <a:buNone/>
                       </a:pPr>
                       <a:r>
-                        <a:rPr lang="en-US" sz="1600" dirty="0">
+                        <a:rPr lang="en-US" sz="1700" dirty="0">
                           <a:solidFill>
                             <a:schemeClr val="tx1"/>
                           </a:solidFill>
                         </a:rPr>
                         <a:t>Decitabine + G-CSF</a:t>
                       </a:r>
-                      <a:endParaRPr lang="en-US" sz="1600" dirty="0"/>
+                      <a:endParaRPr lang="en-US" sz="1700" dirty="0"/>
                     </a:p>
                   </a:txBody>
                   <a:tcPr marL="25400" marR="101600" marT="63500" marB="63500" anchor="ctr">
@@ -8711,14 +8711,14 @@
                         <a:buNone/>
                       </a:pPr>
                       <a:r>
-                        <a:rPr lang="en-US" sz="1600" dirty="0">
+                        <a:rPr lang="en-US" sz="1700" dirty="0">
                           <a:solidFill>
                             <a:schemeClr val="tx1"/>
                           </a:solidFill>
                         </a:rPr>
                         <a:t>Significantly less relapse</a:t>
                       </a:r>
-                      <a:endParaRPr lang="en-US" sz="1600" dirty="0"/>
+                      <a:endParaRPr lang="en-US" sz="1700" dirty="0"/>
                     </a:p>
                   </a:txBody>
                   <a:tcPr marL="25400" marR="101600" marT="63500" marB="63500" anchor="ctr">
@@ -8983,17 +8983,17 @@
         </p:nvGraphicFramePr>
         <p:xfrm>
           <a:off x="685800" y="2240280"/>
-          <a:ext cx="10808208" cy="914400"/>
+          <a:ext cx="10817352" cy="914400"/>
         </p:xfrm>
         <a:graphic>
           <a:graphicData uri="http://schemas.openxmlformats.org/drawingml/2006/table">
             <a:tbl>
               <a:tblPr/>
               <a:tblGrid>
-                <a:gridCol w="3136392"/>
-                <a:gridCol w="2788920"/>
-                <a:gridCol w="1746504"/>
-                <a:gridCol w="3136392"/>
+                <a:gridCol w="3044952"/>
+                <a:gridCol w="2871216"/>
+                <a:gridCol w="1517904"/>
+                <a:gridCol w="3383280"/>
               </a:tblGrid>
               <a:tr h="0">
                 <a:tc>
@@ -9005,14 +9005,14 @@
                         <a:buNone/>
                       </a:pPr>
                       <a:r>
-                        <a:rPr lang="en-US" sz="1500" b="1" dirty="0">
+                        <a:rPr lang="en-US" sz="1600" b="1" dirty="0">
                           <a:solidFill>
                             <a:schemeClr val="tx1"/>
                           </a:solidFill>
                         </a:rPr>
                         <a:t>Drug</a:t>
                       </a:r>
-                      <a:endParaRPr lang="en-US" sz="1500" dirty="0"/>
+                      <a:endParaRPr lang="en-US" sz="1600" dirty="0"/>
                     </a:p>
                   </a:txBody>
                   <a:tcPr marL="25400" marR="101600" marT="63500" marB="63500" anchor="ctr">
@@ -9051,14 +9051,14 @@
                         <a:buNone/>
                       </a:pPr>
                       <a:r>
-                        <a:rPr lang="en-US" sz="1500" b="1" dirty="0">
+                        <a:rPr lang="en-US" sz="1600" b="1" dirty="0">
                           <a:solidFill>
                             <a:schemeClr val="tx1"/>
                           </a:solidFill>
                         </a:rPr>
                         <a:t>Setting</a:t>
                       </a:r>
-                      <a:endParaRPr lang="en-US" sz="1500" dirty="0"/>
+                      <a:endParaRPr lang="en-US" sz="1600" dirty="0"/>
                     </a:p>
                   </a:txBody>
                   <a:tcPr marL="25400" marR="101600" marT="63500" marB="63500" anchor="ctr">
@@ -9097,14 +9097,14 @@
                         <a:buNone/>
                       </a:pPr>
                       <a:r>
-                        <a:rPr lang="en-US" sz="1500" b="1" dirty="0">
+                        <a:rPr lang="en-US" sz="1600" b="1" dirty="0">
                           <a:solidFill>
                             <a:schemeClr val="tx1"/>
                           </a:solidFill>
                         </a:rPr>
                         <a:t>Response</a:t>
                       </a:r>
-                      <a:endParaRPr lang="en-US" sz="1500" dirty="0"/>
+                      <a:endParaRPr lang="en-US" sz="1600" dirty="0"/>
                     </a:p>
                   </a:txBody>
                   <a:tcPr marL="25400" marR="101600" marT="63500" marB="63500" anchor="ctr">
@@ -9143,14 +9143,14 @@
                         <a:buNone/>
                       </a:pPr>
                       <a:r>
-                        <a:rPr lang="en-US" sz="1500" b="1" dirty="0">
+                        <a:rPr lang="en-US" sz="1600" b="1" dirty="0">
                           <a:solidFill>
                             <a:schemeClr val="tx1"/>
                           </a:solidFill>
                         </a:rPr>
                         <a:t>GVHD or toxicity</a:t>
                       </a:r>
-                      <a:endParaRPr lang="en-US" sz="1500" dirty="0"/>
+                      <a:endParaRPr lang="en-US" sz="1600" dirty="0"/>
                     </a:p>
                   </a:txBody>
                   <a:tcPr marL="25400" marR="101600" marT="63500" marB="63500" anchor="ctr">
@@ -9191,14 +9191,14 @@
                         <a:buNone/>
                       </a:pPr>
                       <a:r>
-                        <a:rPr lang="en-US" sz="1500" dirty="0">
+                        <a:rPr lang="en-US" sz="1600" dirty="0">
                           <a:solidFill>
                             <a:schemeClr val="tx1"/>
                           </a:solidFill>
                         </a:rPr>
                         <a:t>Ipilimumab (Davids 2016)</a:t>
                       </a:r>
-                      <a:endParaRPr lang="en-US" sz="1500" dirty="0"/>
+                      <a:endParaRPr lang="en-US" sz="1600" dirty="0"/>
                     </a:p>
                   </a:txBody>
                   <a:tcPr marL="25400" marR="101600" marT="63500" marB="63500" anchor="ctr">
@@ -9231,14 +9231,14 @@
                         <a:buNone/>
                       </a:pPr>
                       <a:r>
-                        <a:rPr lang="en-US" sz="1500" dirty="0">
+                        <a:rPr lang="en-US" sz="1600" dirty="0">
                           <a:solidFill>
                             <a:schemeClr val="tx1"/>
                           </a:solidFill>
                         </a:rPr>
                         <a:t>Relapse after allo</a:t>
                       </a:r>
-                      <a:endParaRPr lang="en-US" sz="1500" dirty="0"/>
+                      <a:endParaRPr lang="en-US" sz="1600" dirty="0"/>
                     </a:p>
                   </a:txBody>
                   <a:tcPr marL="25400" marR="101600" marT="63500" marB="63500" anchor="ctr">
@@ -9271,14 +9271,14 @@
                         <a:buNone/>
                       </a:pPr>
                       <a:r>
-                        <a:rPr lang="en-US" sz="1500" dirty="0">
+                        <a:rPr lang="en-US" sz="1600" dirty="0">
                           <a:solidFill>
                             <a:schemeClr val="tx1"/>
                           </a:solidFill>
                         </a:rPr>
                         <a:t>ORR &lt; 30%</a:t>
                       </a:r>
-                      <a:endParaRPr lang="en-US" sz="1500" dirty="0"/>
+                      <a:endParaRPr lang="en-US" sz="1600" dirty="0"/>
                     </a:p>
                   </a:txBody>
                   <a:tcPr marL="25400" marR="101600" marT="63500" marB="63500" anchor="ctr">
@@ -9311,14 +9311,14 @@
                         <a:buNone/>
                       </a:pPr>
                       <a:r>
-                        <a:rPr lang="en-US" sz="1500" dirty="0">
+                        <a:rPr lang="en-US" sz="1600" dirty="0">
                           <a:solidFill>
                             <a:schemeClr val="tx1"/>
                           </a:solidFill>
                         </a:rPr>
                         <a:t>GVHD not frequent</a:t>
                       </a:r>
-                      <a:endParaRPr lang="en-US" sz="1500" dirty="0"/>
+                      <a:endParaRPr lang="en-US" sz="1600" dirty="0"/>
                     </a:p>
                   </a:txBody>
                   <a:tcPr marL="25400" marR="101600" marT="63500" marB="63500" anchor="ctr">
@@ -9353,14 +9353,14 @@
                         <a:buNone/>
                       </a:pPr>
                       <a:r>
-                        <a:rPr lang="en-US" sz="1500" dirty="0">
+                        <a:rPr lang="en-US" sz="1600" dirty="0">
                           <a:solidFill>
                             <a:schemeClr val="tx1"/>
                           </a:solidFill>
                         </a:rPr>
                         <a:t>PD-1 blockade</a:t>
                       </a:r>
-                      <a:endParaRPr lang="en-US" sz="1500" dirty="0"/>
+                      <a:endParaRPr lang="en-US" sz="1600" dirty="0"/>
                     </a:p>
                   </a:txBody>
                   <a:tcPr marL="25400" marR="101600" marT="63500" marB="63500" anchor="ctr">
@@ -9393,14 +9393,14 @@
                         <a:buNone/>
                       </a:pPr>
                       <a:r>
-                        <a:rPr lang="en-US" sz="1500" dirty="0">
+                        <a:rPr lang="en-US" sz="1600" dirty="0">
                           <a:solidFill>
                             <a:schemeClr val="tx1"/>
                           </a:solidFill>
                         </a:rPr>
                         <a:t>HL after allo, n = 20</a:t>
                       </a:r>
-                      <a:endParaRPr lang="en-US" sz="1500" dirty="0"/>
+                      <a:endParaRPr lang="en-US" sz="1600" dirty="0"/>
                     </a:p>
                   </a:txBody>
                   <a:tcPr marL="25400" marR="101600" marT="63500" marB="63500" anchor="ctr">
@@ -9433,14 +9433,14 @@
                         <a:buNone/>
                       </a:pPr>
                       <a:r>
-                        <a:rPr lang="en-US" sz="1500" dirty="0">
+                        <a:rPr lang="en-US" sz="1600" dirty="0">
                           <a:solidFill>
                             <a:schemeClr val="tx1"/>
                           </a:solidFill>
                         </a:rPr>
                         <a:t>95%</a:t>
                       </a:r>
-                      <a:endParaRPr lang="en-US" sz="1500" dirty="0"/>
+                      <a:endParaRPr lang="en-US" sz="1600" dirty="0"/>
                     </a:p>
                   </a:txBody>
                   <a:tcPr marL="25400" marR="101600" marT="63500" marB="63500" anchor="ctr">
@@ -9473,14 +9473,14 @@
                         <a:buNone/>
                       </a:pPr>
                       <a:r>
-                        <a:rPr lang="en-US" sz="1500" dirty="0">
+                        <a:rPr lang="en-US" sz="1600" dirty="0">
                           <a:solidFill>
                             <a:schemeClr val="tx1"/>
                           </a:solidFill>
                         </a:rPr>
                         <a:t>GVHD 30%; 1 fatal</a:t>
                       </a:r>
-                      <a:endParaRPr lang="en-US" sz="1500" dirty="0"/>
+                      <a:endParaRPr lang="en-US" sz="1600" dirty="0"/>
                     </a:p>
                   </a:txBody>
                   <a:tcPr marL="25400" marR="101600" marT="63500" marB="63500" anchor="ctr">
@@ -9515,14 +9515,14 @@
                         <a:buNone/>
                       </a:pPr>
                       <a:r>
-                        <a:rPr lang="en-US" sz="1500" dirty="0">
-                          <a:solidFill>
-                            <a:schemeClr val="tx1"/>
-                          </a:solidFill>
-                        </a:rPr>
-                        <a:t>PD-1 blockade (Haverkos 2017)</a:t>
-                      </a:r>
-                      <a:endParaRPr lang="en-US" sz="1500" dirty="0"/>
+                        <a:rPr lang="en-US" sz="1600" dirty="0">
+                          <a:solidFill>
+                            <a:schemeClr val="tx1"/>
+                          </a:solidFill>
+                        </a:rPr>
+                        <a:t>PD-1 (Haverkos 2017)</a:t>
+                      </a:r>
+                      <a:endParaRPr lang="en-US" sz="1600" dirty="0"/>
                     </a:p>
                   </a:txBody>
                   <a:tcPr marL="25400" marR="101600" marT="63500" marB="63500" anchor="ctr">
@@ -9555,14 +9555,14 @@
                         <a:buNone/>
                       </a:pPr>
                       <a:r>
-                        <a:rPr lang="en-US" sz="1500" dirty="0">
+                        <a:rPr lang="en-US" sz="1600" dirty="0">
                           <a:solidFill>
                             <a:schemeClr val="tx1"/>
                           </a:solidFill>
                         </a:rPr>
                         <a:t>Lymphoma after allo, n = 31</a:t>
                       </a:r>
-                      <a:endParaRPr lang="en-US" sz="1500" dirty="0"/>
+                      <a:endParaRPr lang="en-US" sz="1600" dirty="0"/>
                     </a:p>
                   </a:txBody>
                   <a:tcPr marL="25400" marR="101600" marT="63500" marB="63500" anchor="ctr">
@@ -9595,14 +9595,14 @@
                         <a:buNone/>
                       </a:pPr>
                       <a:r>
-                        <a:rPr lang="en-US" sz="1500" dirty="0">
+                        <a:rPr lang="en-US" sz="1600" dirty="0">
                           <a:solidFill>
                             <a:schemeClr val="tx1"/>
                           </a:solidFill>
                         </a:rPr>
                         <a:t>77%</a:t>
                       </a:r>
-                      <a:endParaRPr lang="en-US" sz="1500" dirty="0"/>
+                      <a:endParaRPr lang="en-US" sz="1600" dirty="0"/>
                     </a:p>
                   </a:txBody>
                   <a:tcPr marL="25400" marR="101600" marT="63500" marB="63500" anchor="ctr">
@@ -9635,14 +9635,14 @@
                         <a:buNone/>
                       </a:pPr>
                       <a:r>
-                        <a:rPr lang="en-US" sz="1500" dirty="0">
+                        <a:rPr lang="en-US" sz="1600" dirty="0">
                           <a:solidFill>
                             <a:schemeClr val="tx1"/>
                           </a:solidFill>
                         </a:rPr>
                         <a:t>aGVHD 54%; 8 GVHD deaths</a:t>
                       </a:r>
-                      <a:endParaRPr lang="en-US" sz="1500" dirty="0"/>
+                      <a:endParaRPr lang="en-US" sz="1600" dirty="0"/>
                     </a:p>
                   </a:txBody>
                   <a:tcPr marL="25400" marR="101600" marT="63500" marB="63500" anchor="ctr">
@@ -9677,14 +9677,14 @@
                         <a:buNone/>
                       </a:pPr>
                       <a:r>
-                        <a:rPr lang="en-US" sz="1500" dirty="0">
+                        <a:rPr lang="en-US" sz="1600" dirty="0">
                           <a:solidFill>
                             <a:schemeClr val="tx1"/>
                           </a:solidFill>
                         </a:rPr>
                         <a:t>Lenalidomide</a:t>
                       </a:r>
-                      <a:endParaRPr lang="en-US" sz="1500" dirty="0"/>
+                      <a:endParaRPr lang="en-US" sz="1600" dirty="0"/>
                     </a:p>
                   </a:txBody>
                   <a:tcPr marL="25400" marR="101600" marT="63500" marB="63500" anchor="ctr">
@@ -9717,14 +9717,14 @@
                         <a:buNone/>
                       </a:pPr>
                       <a:r>
-                        <a:rPr lang="en-US" sz="1500" dirty="0">
+                        <a:rPr lang="en-US" sz="1600" dirty="0">
                           <a:solidFill>
                             <a:schemeClr val="tx1"/>
                           </a:solidFill>
                         </a:rPr>
                         <a:t>Early after allo</a:t>
                       </a:r>
-                      <a:endParaRPr lang="en-US" sz="1500" dirty="0"/>
+                      <a:endParaRPr lang="en-US" sz="1600" dirty="0"/>
                     </a:p>
                   </a:txBody>
                   <a:tcPr marL="25400" marR="101600" marT="63500" marB="63500" anchor="ctr">
@@ -9757,14 +9757,14 @@
                         <a:buNone/>
                       </a:pPr>
                       <a:r>
-                        <a:rPr lang="en-US" sz="1500" dirty="0">
+                        <a:rPr lang="en-US" sz="1600" dirty="0">
                           <a:solidFill>
                             <a:schemeClr val="tx1"/>
                           </a:solidFill>
                         </a:rPr>
                         <a:t>—</a:t>
                       </a:r>
-                      <a:endParaRPr lang="en-US" sz="1500" dirty="0"/>
+                      <a:endParaRPr lang="en-US" sz="1600" dirty="0"/>
                     </a:p>
                   </a:txBody>
                   <a:tcPr marL="25400" marR="101600" marT="63500" marB="63500" anchor="ctr">
@@ -9797,14 +9797,14 @@
                         <a:buNone/>
                       </a:pPr>
                       <a:r>
-                        <a:rPr lang="en-US" sz="1500" dirty="0">
+                        <a:rPr lang="en-US" sz="1600" dirty="0">
                           <a:solidFill>
                             <a:schemeClr val="tx1"/>
                           </a:solidFill>
                         </a:rPr>
                         <a:t>Severe GVHD; 5 mg after IS stops</a:t>
                       </a:r>
-                      <a:endParaRPr lang="en-US" sz="1500" dirty="0"/>
+                      <a:endParaRPr lang="en-US" sz="1600" dirty="0"/>
                     </a:p>
                   </a:txBody>
                   <a:tcPr marL="25400" marR="101600" marT="63500" marB="63500" anchor="ctr">
@@ -9839,14 +9839,14 @@
                         <a:buNone/>
                       </a:pPr>
                       <a:r>
-                        <a:rPr lang="en-US" sz="1500" dirty="0">
+                        <a:rPr lang="en-US" sz="1600" dirty="0">
                           <a:solidFill>
                             <a:schemeClr val="tx1"/>
                           </a:solidFill>
                         </a:rPr>
                         <a:t>Thalidomide</a:t>
                       </a:r>
-                      <a:endParaRPr lang="en-US" sz="1500" dirty="0"/>
+                      <a:endParaRPr lang="en-US" sz="1600" dirty="0"/>
                     </a:p>
                   </a:txBody>
                   <a:tcPr marL="25400" marR="101600" marT="63500" marB="63500" anchor="ctr">
@@ -9879,14 +9879,14 @@
                         <a:buNone/>
                       </a:pPr>
                       <a:r>
-                        <a:rPr lang="en-US" sz="1500" dirty="0">
+                        <a:rPr lang="en-US" sz="1600" dirty="0">
                           <a:solidFill>
                             <a:schemeClr val="tx1"/>
                           </a:solidFill>
                         </a:rPr>
                         <a:t>With DLI</a:t>
                       </a:r>
-                      <a:endParaRPr lang="en-US" sz="1500" dirty="0"/>
+                      <a:endParaRPr lang="en-US" sz="1600" dirty="0"/>
                     </a:p>
                   </a:txBody>
                   <a:tcPr marL="25400" marR="101600" marT="63500" marB="63500" anchor="ctr">
@@ -9919,14 +9919,14 @@
                         <a:buNone/>
                       </a:pPr>
                       <a:r>
-                        <a:rPr lang="en-US" sz="1500" dirty="0">
+                        <a:rPr lang="en-US" sz="1600" dirty="0">
                           <a:solidFill>
                             <a:schemeClr val="tx1"/>
                           </a:solidFill>
                         </a:rPr>
                         <a:t>—</a:t>
                       </a:r>
-                      <a:endParaRPr lang="en-US" sz="1500" dirty="0"/>
+                      <a:endParaRPr lang="en-US" sz="1600" dirty="0"/>
                     </a:p>
                   </a:txBody>
                   <a:tcPr marL="25400" marR="101600" marT="63500" marB="63500" anchor="ctr">
@@ -9959,14 +9959,14 @@
                         <a:buNone/>
                       </a:pPr>
                       <a:r>
-                        <a:rPr lang="en-US" sz="1500" dirty="0">
+                        <a:rPr lang="en-US" sz="1600" dirty="0">
                           <a:solidFill>
                             <a:schemeClr val="tx1"/>
                           </a:solidFill>
                         </a:rPr>
                         <a:t>No added GVHD risk</a:t>
                       </a:r>
-                      <a:endParaRPr lang="en-US" sz="1500" dirty="0"/>
+                      <a:endParaRPr lang="en-US" sz="1600" dirty="0"/>
                     </a:p>
                   </a:txBody>
                   <a:tcPr marL="25400" marR="101600" marT="63500" marB="63500" anchor="ctr">
@@ -10001,14 +10001,14 @@
                         <a:buNone/>
                       </a:pPr>
                       <a:r>
-                        <a:rPr lang="en-US" sz="1500" dirty="0">
+                        <a:rPr lang="en-US" sz="1600" dirty="0">
                           <a:solidFill>
                             <a:schemeClr val="tx1"/>
                           </a:solidFill>
                         </a:rPr>
                         <a:t>Inotuzumab ozogamicin</a:t>
                       </a:r>
-                      <a:endParaRPr lang="en-US" sz="1500" dirty="0"/>
+                      <a:endParaRPr lang="en-US" sz="1600" dirty="0"/>
                     </a:p>
                   </a:txBody>
                   <a:tcPr marL="25400" marR="101600" marT="63500" marB="63500" anchor="ctr">
@@ -10041,14 +10041,14 @@
                         <a:buNone/>
                       </a:pPr>
                       <a:r>
-                        <a:rPr lang="en-US" sz="1500" dirty="0">
+                        <a:rPr lang="en-US" sz="1600" dirty="0">
                           <a:solidFill>
                             <a:schemeClr val="tx1"/>
                           </a:solidFill>
                         </a:rPr>
                         <a:t>ALL relapse after HCT</a:t>
                       </a:r>
-                      <a:endParaRPr lang="en-US" sz="1500" dirty="0"/>
+                      <a:endParaRPr lang="en-US" sz="1600" dirty="0"/>
                     </a:p>
                   </a:txBody>
                   <a:tcPr marL="25400" marR="101600" marT="63500" marB="63500" anchor="ctr">
@@ -10081,14 +10081,14 @@
                         <a:buNone/>
                       </a:pPr>
                       <a:r>
-                        <a:rPr lang="en-US" sz="1500" dirty="0">
+                        <a:rPr lang="en-US" sz="1600" dirty="0">
                           <a:solidFill>
                             <a:schemeClr val="tx1"/>
                           </a:solidFill>
                         </a:rPr>
                         <a:t>Active</a:t>
                       </a:r>
-                      <a:endParaRPr lang="en-US" sz="1500" dirty="0"/>
+                      <a:endParaRPr lang="en-US" sz="1600" dirty="0"/>
                     </a:p>
                   </a:txBody>
                   <a:tcPr marL="25400" marR="101600" marT="63500" marB="63500" anchor="ctr">
@@ -10121,14 +10121,14 @@
                         <a:buNone/>
                       </a:pPr>
                       <a:r>
-                        <a:rPr lang="en-US" sz="1500" dirty="0">
+                        <a:rPr lang="en-US" sz="1600" dirty="0">
                           <a:solidFill>
                             <a:schemeClr val="tx1"/>
                           </a:solidFill>
                         </a:rPr>
                         <a:t>SOS/VOD ~11%; 22% if HCT follows</a:t>
                       </a:r>
-                      <a:endParaRPr lang="en-US" sz="1500" dirty="0"/>
+                      <a:endParaRPr lang="en-US" sz="1600" dirty="0"/>
                     </a:p>
                   </a:txBody>
                   <a:tcPr marL="25400" marR="101600" marT="63500" marB="63500" anchor="ctr">
@@ -10163,14 +10163,14 @@
                         <a:buNone/>
                       </a:pPr>
                       <a:r>
-                        <a:rPr lang="en-US" sz="1500" dirty="0">
+                        <a:rPr lang="en-US" sz="1600" dirty="0">
                           <a:solidFill>
                             <a:schemeClr val="tx1"/>
                           </a:solidFill>
                         </a:rPr>
                         <a:t>Blinatumomab</a:t>
                       </a:r>
-                      <a:endParaRPr lang="en-US" sz="1500" dirty="0"/>
+                      <a:endParaRPr lang="en-US" sz="1600" dirty="0"/>
                     </a:p>
                   </a:txBody>
                   <a:tcPr marL="25400" marR="101600" marT="63500" marB="63500" anchor="ctr">
@@ -10203,14 +10203,14 @@
                         <a:buNone/>
                       </a:pPr>
                       <a:r>
-                        <a:rPr lang="en-US" sz="1500" dirty="0">
+                        <a:rPr lang="en-US" sz="1600" dirty="0">
                           <a:solidFill>
                             <a:schemeClr val="tx1"/>
                           </a:solidFill>
                         </a:rPr>
                         <a:t>ALL relapse after HCT</a:t>
                       </a:r>
-                      <a:endParaRPr lang="en-US" sz="1500" dirty="0"/>
+                      <a:endParaRPr lang="en-US" sz="1600" dirty="0"/>
                     </a:p>
                   </a:txBody>
                   <a:tcPr marL="25400" marR="101600" marT="63500" marB="63500" anchor="ctr">
@@ -10243,14 +10243,14 @@
                         <a:buNone/>
                       </a:pPr>
                       <a:r>
-                        <a:rPr lang="en-US" sz="1500" dirty="0">
+                        <a:rPr lang="en-US" sz="1600" dirty="0">
                           <a:solidFill>
                             <a:schemeClr val="tx1"/>
                           </a:solidFill>
                         </a:rPr>
                         <a:t>Active, also with DLI</a:t>
                       </a:r>
-                      <a:endParaRPr lang="en-US" sz="1500" dirty="0"/>
+                      <a:endParaRPr lang="en-US" sz="1600" dirty="0"/>
                     </a:p>
                   </a:txBody>
                   <a:tcPr marL="25400" marR="101600" marT="63500" marB="63500" anchor="ctr">
@@ -10283,14 +10283,14 @@
                         <a:buNone/>
                       </a:pPr>
                       <a:r>
-                        <a:rPr lang="en-US" sz="1500" dirty="0">
+                        <a:rPr lang="en-US" sz="1600" dirty="0">
                           <a:solidFill>
                             <a:schemeClr val="tx1"/>
                           </a:solidFill>
                         </a:rPr>
                         <a:t>Maintenance feasible</a:t>
                       </a:r>
-                      <a:endParaRPr lang="en-US" sz="1500" dirty="0"/>
+                      <a:endParaRPr lang="en-US" sz="1600" dirty="0"/>
                     </a:p>
                   </a:txBody>
                   <a:tcPr marL="25400" marR="101600" marT="63500" marB="63500" anchor="ctr">
@@ -11053,7 +11053,7 @@
                             <a:schemeClr val="tx1"/>
                           </a:solidFill>
                         </a:rPr>
-                        <a:t>Matched related</a:t>
+                        <a:t>Related (‘MRD’)</a:t>
                       </a:r>
                       <a:endParaRPr lang="en-US" sz="1800" dirty="0"/>
                     </a:p>
@@ -12246,7 +12246,7 @@
         </p:nvSpPr>
         <p:spPr>
           <a:xfrm>
-            <a:off x="685800" y="5486400"/>
+            <a:off x="685800" y="4800600"/>
             <a:ext cx="10817352" cy="411480"/>
           </a:xfrm>
           <a:prstGeom prst="rect">
@@ -12268,7 +12268,7 @@
                   <a:schemeClr val="tx1"/>
                 </a:solidFill>
               </a:rPr>
-              <a:t>CD3+ cells/kg; level C. Interval ≥ 4–6 weeks. Escalate 0.5–1 log; relapse 1 log to max 1 × 10⁸/kg. (‘MRD’ in Table 59.1 = matched related donor.)</a:t>
+              <a:t>CD3+ cells/kg; level C. Interval ≥ 4–6 weeks; escalate 0.5–1 log (relapse: 1 log, max 1 × 10⁸/kg)</a:t>
             </a:r>
             <a:endParaRPr lang="en-US" sz="1600" dirty="0"/>
           </a:p>
@@ -12494,14 +12494,14 @@
                         <a:buNone/>
                       </a:pPr>
                       <a:r>
-                        <a:rPr lang="en-US" sz="1600" b="1" dirty="0">
+                        <a:rPr lang="en-US" sz="1800" b="1" dirty="0">
                           <a:solidFill>
                             <a:schemeClr val="tx1"/>
                           </a:solidFill>
                         </a:rPr>
                         <a:t>Factor</a:t>
                       </a:r>
-                      <a:endParaRPr lang="en-US" sz="1600" dirty="0"/>
+                      <a:endParaRPr lang="en-US" sz="1800" dirty="0"/>
                     </a:p>
                   </a:txBody>
                   <a:tcPr marL="25400" marR="101600" marT="63500" marB="63500" anchor="ctr">
@@ -12540,14 +12540,14 @@
                         <a:buNone/>
                       </a:pPr>
                       <a:r>
-                        <a:rPr lang="en-US" sz="1600" b="1" dirty="0">
+                        <a:rPr lang="en-US" sz="1800" b="1" dirty="0">
                           <a:solidFill>
                             <a:schemeClr val="tx1"/>
                           </a:solidFill>
                         </a:rPr>
                         <a:t>Effect on DLI</a:t>
                       </a:r>
-                      <a:endParaRPr lang="en-US" sz="1600" dirty="0"/>
+                      <a:endParaRPr lang="en-US" sz="1800" dirty="0"/>
                     </a:p>
                   </a:txBody>
                   <a:tcPr marL="25400" marR="101600" marT="63500" marB="63500" anchor="ctr">
@@ -12588,14 +12588,14 @@
                         <a:buNone/>
                       </a:pPr>
                       <a:r>
-                        <a:rPr lang="en-US" sz="1600" dirty="0">
+                        <a:rPr lang="en-US" sz="1800" dirty="0">
                           <a:solidFill>
                             <a:schemeClr val="tx1"/>
                           </a:solidFill>
                         </a:rPr>
                         <a:t>High sensitivity to DLI</a:t>
                       </a:r>
-                      <a:endParaRPr lang="en-US" sz="1600" dirty="0"/>
+                      <a:endParaRPr lang="en-US" sz="1800" dirty="0"/>
                     </a:p>
                   </a:txBody>
                   <a:tcPr marL="25400" marR="101600" marT="63500" marB="63500" anchor="ctr">
@@ -12628,14 +12628,14 @@
                         <a:buNone/>
                       </a:pPr>
                       <a:r>
-                        <a:rPr lang="en-US" sz="1600" dirty="0">
+                        <a:rPr lang="en-US" sz="1800" dirty="0">
                           <a:solidFill>
                             <a:schemeClr val="tx1"/>
                           </a:solidFill>
                         </a:rPr>
                         <a:t>CML, myelofibrosis, low-grade NHL</a:t>
                       </a:r>
-                      <a:endParaRPr lang="en-US" sz="1600" dirty="0"/>
+                      <a:endParaRPr lang="en-US" sz="1800" dirty="0"/>
                     </a:p>
                   </a:txBody>
                   <a:tcPr marL="25400" marR="101600" marT="63500" marB="63500" anchor="ctr">
@@ -12670,14 +12670,14 @@
                         <a:buNone/>
                       </a:pPr>
                       <a:r>
-                        <a:rPr lang="en-US" sz="1600" dirty="0">
+                        <a:rPr lang="en-US" sz="1800" dirty="0">
                           <a:solidFill>
                             <a:schemeClr val="tx1"/>
                           </a:solidFill>
                         </a:rPr>
                         <a:t>Intermediate sensitivity</a:t>
                       </a:r>
-                      <a:endParaRPr lang="en-US" sz="1600" dirty="0"/>
+                      <a:endParaRPr lang="en-US" sz="1800" dirty="0"/>
                     </a:p>
                   </a:txBody>
                   <a:tcPr marL="25400" marR="101600" marT="63500" marB="63500" anchor="ctr">
@@ -12710,14 +12710,14 @@
                         <a:buNone/>
                       </a:pPr>
                       <a:r>
-                        <a:rPr lang="en-US" sz="1600" dirty="0">
+                        <a:rPr lang="en-US" sz="1800" dirty="0">
                           <a:solidFill>
                             <a:schemeClr val="tx1"/>
                           </a:solidFill>
                         </a:rPr>
                         <a:t>AML, MDS, multiple myeloma, Hodgkin's disease</a:t>
                       </a:r>
-                      <a:endParaRPr lang="en-US" sz="1600" dirty="0"/>
+                      <a:endParaRPr lang="en-US" sz="1800" dirty="0"/>
                     </a:p>
                   </a:txBody>
                   <a:tcPr marL="25400" marR="101600" marT="63500" marB="63500" anchor="ctr">
@@ -12752,14 +12752,14 @@
                         <a:buNone/>
                       </a:pPr>
                       <a:r>
-                        <a:rPr lang="en-US" sz="1600" dirty="0">
+                        <a:rPr lang="en-US" sz="1800" dirty="0">
                           <a:solidFill>
                             <a:schemeClr val="tx1"/>
                           </a:solidFill>
                         </a:rPr>
                         <a:t>Low sensitivity</a:t>
                       </a:r>
-                      <a:endParaRPr lang="en-US" sz="1600" dirty="0"/>
+                      <a:endParaRPr lang="en-US" sz="1800" dirty="0"/>
                     </a:p>
                   </a:txBody>
                   <a:tcPr marL="25400" marR="101600" marT="63500" marB="63500" anchor="ctr">
@@ -12792,14 +12792,14 @@
                         <a:buNone/>
                       </a:pPr>
                       <a:r>
-                        <a:rPr lang="en-US" sz="1600" dirty="0">
+                        <a:rPr lang="en-US" sz="1800" dirty="0">
                           <a:solidFill>
                             <a:schemeClr val="tx1"/>
                           </a:solidFill>
                         </a:rPr>
                         <a:t>ALL, DLBCL</a:t>
                       </a:r>
-                      <a:endParaRPr lang="en-US" sz="1600" dirty="0"/>
+                      <a:endParaRPr lang="en-US" sz="1800" dirty="0"/>
                     </a:p>
                   </a:txBody>
                   <a:tcPr marL="25400" marR="101600" marT="63500" marB="63500" anchor="ctr">
@@ -12834,14 +12834,14 @@
                         <a:buNone/>
                       </a:pPr>
                       <a:r>
-                        <a:rPr lang="en-US" sz="1600" dirty="0">
+                        <a:rPr lang="en-US" sz="1800" dirty="0">
                           <a:solidFill>
                             <a:schemeClr val="tx1"/>
                           </a:solidFill>
                         </a:rPr>
                         <a:t>After PTCY or resolved GVHD</a:t>
                       </a:r>
-                      <a:endParaRPr lang="en-US" sz="1600" dirty="0"/>
+                      <a:endParaRPr lang="en-US" sz="1800" dirty="0"/>
                     </a:p>
                   </a:txBody>
                   <a:tcPr marL="25400" marR="101600" marT="63500" marB="63500" anchor="ctr">
@@ -12874,14 +12874,14 @@
                         <a:buNone/>
                       </a:pPr>
                       <a:r>
-                        <a:rPr lang="en-US" sz="1600" dirty="0">
+                        <a:rPr lang="en-US" sz="1800" dirty="0">
                           <a:solidFill>
                             <a:schemeClr val="tx1"/>
                           </a:solidFill>
                         </a:rPr>
                         <a:t>Host DCs depleted: earlier DLI, may need a higher dose</a:t>
                       </a:r>
-                      <a:endParaRPr lang="en-US" sz="1600" dirty="0"/>
+                      <a:endParaRPr lang="en-US" sz="1800" dirty="0"/>
                     </a:p>
                   </a:txBody>
                   <a:tcPr marL="25400" marR="101600" marT="63500" marB="63500" anchor="ctr">
@@ -12916,14 +12916,14 @@
                         <a:buNone/>
                       </a:pPr>
                       <a:r>
-                        <a:rPr lang="en-US" sz="1600" dirty="0">
+                        <a:rPr lang="en-US" sz="1800" dirty="0">
                           <a:solidFill>
                             <a:schemeClr val="tx1"/>
                           </a:solidFill>
                         </a:rPr>
                         <a:t>Haplo or mismatched donor</a:t>
                       </a:r>
-                      <a:endParaRPr lang="en-US" sz="1600" dirty="0"/>
+                      <a:endParaRPr lang="en-US" sz="1800" dirty="0"/>
                     </a:p>
                   </a:txBody>
                   <a:tcPr marL="25400" marR="101600" marT="63500" marB="63500" anchor="ctr">
@@ -12956,14 +12956,14 @@
                         <a:buNone/>
                       </a:pPr>
                       <a:r>
-                        <a:rPr lang="en-US" sz="1600" dirty="0">
+                        <a:rPr lang="en-US" sz="1800" dirty="0">
                           <a:solidFill>
                             <a:schemeClr val="tx1"/>
                           </a:solidFill>
                         </a:rPr>
                         <a:t>Memory alloreactive T cells: stronger response</a:t>
                       </a:r>
-                      <a:endParaRPr lang="en-US" sz="1600" dirty="0"/>
+                      <a:endParaRPr lang="en-US" sz="1800" dirty="0"/>
                     </a:p>
                   </a:txBody>
                   <a:tcPr marL="25400" marR="101600" marT="63500" marB="63500" anchor="ctr">
@@ -12998,14 +12998,14 @@
                         <a:buNone/>
                       </a:pPr>
                       <a:r>
-                        <a:rPr lang="en-US" sz="1600" dirty="0">
+                        <a:rPr lang="en-US" sz="1800" dirty="0">
                           <a:solidFill>
                             <a:schemeClr val="tx1"/>
                           </a:solidFill>
                         </a:rPr>
                         <a:t>Product</a:t>
                       </a:r>
-                      <a:endParaRPr lang="en-US" sz="1600" dirty="0"/>
+                      <a:endParaRPr lang="en-US" sz="1800" dirty="0"/>
                     </a:p>
                   </a:txBody>
                   <a:tcPr marL="25400" marR="101600" marT="63500" marB="63500" anchor="ctr">
@@ -13038,14 +13038,14 @@
                         <a:buNone/>
                       </a:pPr>
                       <a:r>
-                        <a:rPr lang="en-US" sz="1600" dirty="0">
+                        <a:rPr lang="en-US" sz="1800" dirty="0">
                           <a:solidFill>
                             <a:schemeClr val="tx1"/>
                           </a:solidFill>
                         </a:rPr>
                         <a:t>Fresh beats frozen; G-CSF-mobilized: same mortality</a:t>
                       </a:r>
-                      <a:endParaRPr lang="en-US" sz="1600" dirty="0"/>
+                      <a:endParaRPr lang="en-US" sz="1800" dirty="0"/>
                     </a:p>
                   </a:txBody>
                   <a:tcPr marL="25400" marR="101600" marT="63500" marB="63500" anchor="ctr">
@@ -13080,14 +13080,14 @@
                         <a:buNone/>
                       </a:pPr>
                       <a:r>
-                        <a:rPr lang="en-US" sz="1600" dirty="0">
+                        <a:rPr lang="en-US" sz="1800" dirty="0">
                           <a:solidFill>
                             <a:schemeClr val="tx1"/>
                           </a:solidFill>
                         </a:rPr>
                         <a:t>Immune escape</a:t>
                       </a:r>
-                      <a:endParaRPr lang="en-US" sz="1600" dirty="0"/>
+                      <a:endParaRPr lang="en-US" sz="1800" dirty="0"/>
                     </a:p>
                   </a:txBody>
                   <a:tcPr marL="25400" marR="101600" marT="63500" marB="63500" anchor="ctr">
@@ -13120,14 +13120,14 @@
                         <a:buNone/>
                       </a:pPr>
                       <a:r>
-                        <a:rPr lang="en-US" sz="1600" dirty="0">
+                        <a:rPr lang="en-US" sz="1800" dirty="0">
                           <a:solidFill>
                             <a:schemeClr val="tx1"/>
                           </a:solidFill>
                         </a:rPr>
                         <a:t>Loss of mismatched HLA after haplo; HLA downregulation</a:t>
                       </a:r>
-                      <a:endParaRPr lang="en-US" sz="1600" dirty="0"/>
+                      <a:endParaRPr lang="en-US" sz="1800" dirty="0"/>
                     </a:p>
                   </a:txBody>
                   <a:tcPr marL="25400" marR="101600" marT="63500" marB="63500" anchor="ctr">
@@ -13162,14 +13162,14 @@
                         <a:buNone/>
                       </a:pPr>
                       <a:r>
-                        <a:rPr lang="en-US" sz="1600" dirty="0">
+                        <a:rPr lang="en-US" sz="1800" dirty="0">
                           <a:solidFill>
                             <a:schemeClr val="tx1"/>
                           </a:solidFill>
                         </a:rPr>
                         <a:t>Co-administered drugs</a:t>
                       </a:r>
-                      <a:endParaRPr lang="en-US" sz="1600" dirty="0"/>
+                      <a:endParaRPr lang="en-US" sz="1800" dirty="0"/>
                     </a:p>
                   </a:txBody>
                   <a:tcPr marL="25400" marR="101600" marT="63500" marB="63500" anchor="ctr">
@@ -13202,14 +13202,14 @@
                         <a:buNone/>
                       </a:pPr>
                       <a:r>
-                        <a:rPr lang="en-US" sz="1600" dirty="0">
+                        <a:rPr lang="en-US" sz="1800" dirty="0">
                           <a:solidFill>
                             <a:schemeClr val="tx1"/>
                           </a:solidFill>
                         </a:rPr>
                         <a:t>Early lenalidomide raises GVHD; TKI, HMA, HDACi under study</a:t>
                       </a:r>
-                      <a:endParaRPr lang="en-US" sz="1600" dirty="0"/>
+                      <a:endParaRPr lang="en-US" sz="1800" dirty="0"/>
                     </a:p>
                   </a:txBody>
                   <a:tcPr marL="25400" marR="101600" marT="63500" marB="63500" anchor="ctr">
@@ -14294,7 +14294,7 @@
                   <a:schemeClr val="tx1"/>
                 </a:solidFill>
               </a:rPr>
-              <a:t>Four parts, from detecting relapse to preventing it</a:t>
+              <a:t>From detecting relapse to preventing it</a:t>
             </a:r>
             <a:endParaRPr lang="en-US" sz="3600" dirty="0"/>
           </a:p>
@@ -14346,7 +14346,7 @@
         </p:nvSpPr>
         <p:spPr>
           <a:xfrm>
-            <a:off x="685800" y="2514600"/>
+            <a:off x="685800" y="2057400"/>
             <a:ext cx="640080" cy="685800"/>
           </a:xfrm>
           <a:prstGeom prst="rect">
@@ -14385,7 +14385,7 @@
         </p:nvSpPr>
         <p:spPr>
           <a:xfrm>
-            <a:off x="1463040" y="2560320"/>
+            <a:off x="1463040" y="2103120"/>
             <a:ext cx="8412480" cy="365760"/>
           </a:xfrm>
           <a:prstGeom prst="rect">
@@ -14421,7 +14421,7 @@
         </p:nvSpPr>
         <p:spPr>
           <a:xfrm>
-            <a:off x="1463040" y="2953512"/>
+            <a:off x="1463040" y="2496312"/>
             <a:ext cx="8412480" cy="320040"/>
           </a:xfrm>
           <a:prstGeom prst="rect">
@@ -14457,7 +14457,7 @@
         </p:nvSpPr>
         <p:spPr>
           <a:xfrm>
-            <a:off x="10058400" y="2606040"/>
+            <a:off x="10058400" y="2148840"/>
             <a:ext cx="1444752" cy="320040"/>
           </a:xfrm>
           <a:prstGeom prst="rect">
@@ -14493,7 +14493,7 @@
         </p:nvSpPr>
         <p:spPr>
           <a:xfrm>
-            <a:off x="685800" y="3328416"/>
+            <a:off x="685800" y="2871216"/>
             <a:ext cx="10817352" cy="0"/>
           </a:xfrm>
           <a:prstGeom prst="line">
@@ -14516,7 +14516,7 @@
         </p:nvSpPr>
         <p:spPr>
           <a:xfrm>
-            <a:off x="685800" y="3429000"/>
+            <a:off x="685800" y="2971800"/>
             <a:ext cx="640080" cy="685800"/>
           </a:xfrm>
           <a:prstGeom prst="rect">
@@ -14555,7 +14555,7 @@
         </p:nvSpPr>
         <p:spPr>
           <a:xfrm>
-            <a:off x="1463040" y="3474720"/>
+            <a:off x="1463040" y="3017520"/>
             <a:ext cx="8412480" cy="365760"/>
           </a:xfrm>
           <a:prstGeom prst="rect">
@@ -14591,7 +14591,7 @@
         </p:nvSpPr>
         <p:spPr>
           <a:xfrm>
-            <a:off x="1463040" y="3867912"/>
+            <a:off x="1463040" y="3410712"/>
             <a:ext cx="8412480" cy="320040"/>
           </a:xfrm>
           <a:prstGeom prst="rect">
@@ -14627,7 +14627,7 @@
         </p:nvSpPr>
         <p:spPr>
           <a:xfrm>
-            <a:off x="10058400" y="3520440"/>
+            <a:off x="10058400" y="3063240"/>
             <a:ext cx="1444752" cy="320040"/>
           </a:xfrm>
           <a:prstGeom prst="rect">
@@ -14663,7 +14663,7 @@
         </p:nvSpPr>
         <p:spPr>
           <a:xfrm>
-            <a:off x="685800" y="4242816"/>
+            <a:off x="685800" y="3785616"/>
             <a:ext cx="10817352" cy="0"/>
           </a:xfrm>
           <a:prstGeom prst="line">
@@ -14686,7 +14686,7 @@
         </p:nvSpPr>
         <p:spPr>
           <a:xfrm>
-            <a:off x="685800" y="4343400"/>
+            <a:off x="685800" y="3886200"/>
             <a:ext cx="640080" cy="685800"/>
           </a:xfrm>
           <a:prstGeom prst="rect">
@@ -14725,7 +14725,7 @@
         </p:nvSpPr>
         <p:spPr>
           <a:xfrm>
-            <a:off x="1463040" y="4389120"/>
+            <a:off x="1463040" y="3931920"/>
             <a:ext cx="8412480" cy="365760"/>
           </a:xfrm>
           <a:prstGeom prst="rect">
@@ -14761,7 +14761,7 @@
         </p:nvSpPr>
         <p:spPr>
           <a:xfrm>
-            <a:off x="1463040" y="4782312"/>
+            <a:off x="1463040" y="4325112"/>
             <a:ext cx="8412480" cy="320040"/>
           </a:xfrm>
           <a:prstGeom prst="rect">
@@ -14797,7 +14797,7 @@
         </p:nvSpPr>
         <p:spPr>
           <a:xfrm>
-            <a:off x="10058400" y="4434840"/>
+            <a:off x="10058400" y="3977640"/>
             <a:ext cx="1444752" cy="320040"/>
           </a:xfrm>
           <a:prstGeom prst="rect">
@@ -14833,7 +14833,7 @@
         </p:nvSpPr>
         <p:spPr>
           <a:xfrm>
-            <a:off x="685800" y="5157216"/>
+            <a:off x="685800" y="4700016"/>
             <a:ext cx="10817352" cy="0"/>
           </a:xfrm>
           <a:prstGeom prst="line">
@@ -14856,7 +14856,7 @@
         </p:nvSpPr>
         <p:spPr>
           <a:xfrm>
-            <a:off x="685800" y="5257800"/>
+            <a:off x="685800" y="4800600"/>
             <a:ext cx="640080" cy="685800"/>
           </a:xfrm>
           <a:prstGeom prst="rect">
@@ -14895,7 +14895,7 @@
         </p:nvSpPr>
         <p:spPr>
           <a:xfrm>
-            <a:off x="1463040" y="5303520"/>
+            <a:off x="1463040" y="4846320"/>
             <a:ext cx="8412480" cy="365760"/>
           </a:xfrm>
           <a:prstGeom prst="rect">
@@ -14931,7 +14931,7 @@
         </p:nvSpPr>
         <p:spPr>
           <a:xfrm>
-            <a:off x="1463040" y="5696712"/>
+            <a:off x="1463040" y="5239512"/>
             <a:ext cx="8412480" cy="320040"/>
           </a:xfrm>
           <a:prstGeom prst="rect">
@@ -14967,7 +14967,7 @@
         </p:nvSpPr>
         <p:spPr>
           <a:xfrm>
-            <a:off x="10058400" y="5349240"/>
+            <a:off x="10058400" y="4892040"/>
             <a:ext cx="1444752" cy="320040"/>
           </a:xfrm>
           <a:prstGeom prst="rect">
@@ -15840,7 +15840,7 @@
                   <a:schemeClr val="tx1"/>
                 </a:solidFill>
               </a:rPr>
-              <a:t>Rising MRD without morphological relapse is the pre-emptive setting. Table 59.1 gives 1 × 10⁶/kg for an unrelated donor at 6 months (1 × 10⁵/kg at 3 months). 1 × 10⁷/kg with chemotherapy is for overt relapse; 1 × 10⁸/kg is the ceiling after escalation. Repeat after ≥ 4–6 weeks if MRD persists and there is no GVHD.</a:t>
+              <a:t>Rising MRD without morphological relapse is the pre-emptive setting. Table 59.1 gives 1 × 10⁶/kg for an unrelated donor at 6 months. Overt relapse needs chemotherapy plus 1 × 10⁷/kg; the ceiling after escalation is 1 × 10⁸/kg. Repeat after ≥ 4–6 weeks if MRD persists without GVHD.</a:t>
             </a:r>
             <a:endParaRPr lang="en-US" sz="1800" dirty="0"/>
           </a:p>
@@ -18724,7 +18724,21 @@
                             <a:schemeClr val="tx1"/>
                           </a:solidFill>
                         </a:rPr>
-                        <a:t>1-y RFS 66% with DLI; 2-y RFS 74% alone</a:t>
+                        <a:t>RFS 66% at 1 y with DLI;</a:t>
+                      </a:r>
+                      <a:endParaRPr lang="en-US" sz="1500" dirty="0"/>
+                    </a:p>
+                    <a:p>
+                      <a:pPr indent="0" marL="0">
+                        <a:buNone/>
+                      </a:pPr>
+                      <a:r>
+                        <a:rPr lang="en-US" sz="1500" dirty="0">
+                          <a:solidFill>
+                            <a:schemeClr val="tx1"/>
+                          </a:solidFill>
+                        </a:rPr>
+                        <a:t>74% at 2 y alone</a:t>
                       </a:r>
                       <a:endParaRPr lang="en-US" sz="1500" dirty="0"/>
                     </a:p>
@@ -19621,7 +19635,7 @@
                             <a:schemeClr val="tx1"/>
                           </a:solidFill>
                         </a:rPr>
-                        <a:t>Beat thalidomide, mainly in renal</a:t>
+                        <a:t>Beat thalidomide in renal failure</a:t>
                       </a:r>
                       <a:endParaRPr lang="en-US" sz="1600" dirty="0"/>
                     </a:p>
@@ -19635,7 +19649,7 @@
                             <a:schemeClr val="tx1"/>
                           </a:solidFill>
                         </a:rPr>
-                        <a:t>failure or high-risk cytogenetics</a:t>
+                        <a:t>and high-risk cytogenetics</a:t>
                       </a:r>
                       <a:endParaRPr lang="en-US" sz="1600" dirty="0"/>
                     </a:p>
@@ -22953,14 +22967,14 @@
                         <a:buNone/>
                       </a:pPr>
                       <a:r>
-                        <a:rPr lang="en-US" sz="1600" b="1" dirty="0">
+                        <a:rPr lang="en-US" sz="1700" b="1" dirty="0">
                           <a:solidFill>
                             <a:schemeClr val="tx1"/>
                           </a:solidFill>
                         </a:rPr>
                         <a:t>Method</a:t>
                       </a:r>
-                      <a:endParaRPr lang="en-US" sz="1600" dirty="0"/>
+                      <a:endParaRPr lang="en-US" sz="1700" dirty="0"/>
                     </a:p>
                   </a:txBody>
                   <a:tcPr marL="25400" marR="101600" marT="63500" marB="63500" anchor="ctr">
@@ -22999,14 +23013,14 @@
                         <a:buNone/>
                       </a:pPr>
                       <a:r>
-                        <a:rPr lang="en-US" sz="1600" b="1" dirty="0">
+                        <a:rPr lang="en-US" sz="1700" b="1" dirty="0">
                           <a:solidFill>
                             <a:schemeClr val="tx1"/>
                           </a:solidFill>
                         </a:rPr>
                         <a:t>Applicable</a:t>
                       </a:r>
-                      <a:endParaRPr lang="en-US" sz="1600" dirty="0"/>
+                      <a:endParaRPr lang="en-US" sz="1700" dirty="0"/>
                     </a:p>
                   </a:txBody>
                   <a:tcPr marL="25400" marR="101600" marT="63500" marB="63500" anchor="ctr">
@@ -23045,14 +23059,14 @@
                         <a:buNone/>
                       </a:pPr>
                       <a:r>
-                        <a:rPr lang="en-US" sz="1600" b="1" dirty="0">
+                        <a:rPr lang="en-US" sz="1700" b="1" dirty="0">
                           <a:solidFill>
                             <a:schemeClr val="tx1"/>
                           </a:solidFill>
                         </a:rPr>
                         <a:t>Principle</a:t>
                       </a:r>
-                      <a:endParaRPr lang="en-US" sz="1600" dirty="0"/>
+                      <a:endParaRPr lang="en-US" sz="1700" dirty="0"/>
                     </a:p>
                   </a:txBody>
                   <a:tcPr marL="25400" marR="101600" marT="63500" marB="63500" anchor="ctr">
@@ -23091,14 +23105,14 @@
                         <a:buNone/>
                       </a:pPr>
                       <a:r>
-                        <a:rPr lang="en-US" sz="1600" b="1" dirty="0">
+                        <a:rPr lang="en-US" sz="1700" b="1" dirty="0">
                           <a:solidFill>
                             <a:schemeClr val="tx1"/>
                           </a:solidFill>
                         </a:rPr>
                         <a:t>Caveat</a:t>
                       </a:r>
-                      <a:endParaRPr lang="en-US" sz="1600" dirty="0"/>
+                      <a:endParaRPr lang="en-US" sz="1700" dirty="0"/>
                     </a:p>
                   </a:txBody>
                   <a:tcPr marL="25400" marR="101600" marT="63500" marB="63500" anchor="ctr">
@@ -23139,14 +23153,14 @@
                         <a:buNone/>
                       </a:pPr>
                       <a:r>
-                        <a:rPr lang="en-US" sz="1600" dirty="0">
+                        <a:rPr lang="en-US" sz="1700" dirty="0">
                           <a:solidFill>
                             <a:schemeClr val="tx1"/>
                           </a:solidFill>
                         </a:rPr>
                         <a:t>RT-qPCR</a:t>
                       </a:r>
-                      <a:endParaRPr lang="en-US" sz="1600" dirty="0"/>
+                      <a:endParaRPr lang="en-US" sz="1700" dirty="0"/>
                     </a:p>
                   </a:txBody>
                   <a:tcPr marL="25400" marR="101600" marT="63500" marB="63500" anchor="ctr">
@@ -23179,14 +23193,14 @@
                         <a:buNone/>
                       </a:pPr>
                       <a:r>
-                        <a:rPr lang="en-US" sz="1600" dirty="0">
+                        <a:rPr lang="en-US" sz="1700" dirty="0">
                           <a:solidFill>
                             <a:schemeClr val="tx1"/>
                           </a:solidFill>
                         </a:rPr>
                         <a:t>40–60% of patients</a:t>
                       </a:r>
-                      <a:endParaRPr lang="en-US" sz="1600" dirty="0"/>
+                      <a:endParaRPr lang="en-US" sz="1700" dirty="0"/>
                     </a:p>
                   </a:txBody>
                   <a:tcPr marL="25400" marR="101600" marT="63500" marB="63500" anchor="ctr">
@@ -23219,28 +23233,28 @@
                         <a:buNone/>
                       </a:pPr>
                       <a:r>
-                        <a:rPr lang="en-US" sz="1600" dirty="0">
+                        <a:rPr lang="en-US" sz="1700" dirty="0">
                           <a:solidFill>
                             <a:schemeClr val="tx1"/>
                           </a:solidFill>
                         </a:rPr>
                         <a:t>Fusion genes, mutated NPM1;</a:t>
                       </a:r>
-                      <a:endParaRPr lang="en-US" sz="1600" dirty="0"/>
-                    </a:p>
-                    <a:p>
-                      <a:pPr indent="0" marL="0">
-                        <a:buNone/>
-                      </a:pPr>
-                      <a:r>
-                        <a:rPr lang="en-US" sz="1600" dirty="0">
+                      <a:endParaRPr lang="en-US" sz="1700" dirty="0"/>
+                    </a:p>
+                    <a:p>
+                      <a:pPr indent="0" marL="0">
+                        <a:buNone/>
+                      </a:pPr>
+                      <a:r>
+                        <a:rPr lang="en-US" sz="1700" dirty="0">
                           <a:solidFill>
                             <a:schemeClr val="tx1"/>
                           </a:solidFill>
                         </a:rPr>
                         <a:t>EAC-standardized</a:t>
                       </a:r>
-                      <a:endParaRPr lang="en-US" sz="1600" dirty="0"/>
+                      <a:endParaRPr lang="en-US" sz="1700" dirty="0"/>
                     </a:p>
                   </a:txBody>
                   <a:tcPr marL="25400" marR="101600" marT="63500" marB="63500" anchor="ctr">
@@ -23273,28 +23287,28 @@
                         <a:buNone/>
                       </a:pPr>
                       <a:r>
-                        <a:rPr lang="en-US" sz="1600" dirty="0">
+                        <a:rPr lang="en-US" sz="1700" dirty="0">
                           <a:solidFill>
                             <a:schemeClr val="tx1"/>
                           </a:solidFill>
                         </a:rPr>
                         <a:t>NPM1 is the best-validated</a:t>
                       </a:r>
-                      <a:endParaRPr lang="en-US" sz="1600" dirty="0"/>
-                    </a:p>
-                    <a:p>
-                      <a:pPr indent="0" marL="0">
-                        <a:buNone/>
-                      </a:pPr>
-                      <a:r>
-                        <a:rPr lang="en-US" sz="1600" dirty="0">
+                      <a:endParaRPr lang="en-US" sz="1700" dirty="0"/>
+                    </a:p>
+                    <a:p>
+                      <a:pPr indent="0" marL="0">
+                        <a:buNone/>
+                      </a:pPr>
+                      <a:r>
+                        <a:rPr lang="en-US" sz="1700" dirty="0">
                           <a:solidFill>
                             <a:schemeClr val="tx1"/>
                           </a:solidFill>
                         </a:rPr>
                         <a:t>molecular marker</a:t>
                       </a:r>
-                      <a:endParaRPr lang="en-US" sz="1600" dirty="0"/>
+                      <a:endParaRPr lang="en-US" sz="1700" dirty="0"/>
                     </a:p>
                   </a:txBody>
                   <a:tcPr marL="25400" marR="101600" marT="63500" marB="63500" anchor="ctr">
@@ -23329,14 +23343,14 @@
                         <a:buNone/>
                       </a:pPr>
                       <a:r>
-                        <a:rPr lang="en-US" sz="1600" dirty="0">
+                        <a:rPr lang="en-US" sz="1700" dirty="0">
                           <a:solidFill>
                             <a:schemeClr val="tx1"/>
                           </a:solidFill>
                         </a:rPr>
                         <a:t>Multicolour flow (MFC)</a:t>
                       </a:r>
-                      <a:endParaRPr lang="en-US" sz="1600" dirty="0"/>
+                      <a:endParaRPr lang="en-US" sz="1700" dirty="0"/>
                     </a:p>
                   </a:txBody>
                   <a:tcPr marL="25400" marR="101600" marT="63500" marB="63500" anchor="ctr">
@@ -23369,14 +23383,14 @@
                         <a:buNone/>
                       </a:pPr>
                       <a:r>
-                        <a:rPr lang="en-US" sz="1600" dirty="0">
+                        <a:rPr lang="en-US" sz="1700" dirty="0">
                           <a:solidFill>
                             <a:schemeClr val="tx1"/>
                           </a:solidFill>
                         </a:rPr>
                         <a:t>&gt; 90% of patients</a:t>
                       </a:r>
-                      <a:endParaRPr lang="en-US" sz="1600" dirty="0"/>
+                      <a:endParaRPr lang="en-US" sz="1700" dirty="0"/>
                     </a:p>
                   </a:txBody>
                   <a:tcPr marL="25400" marR="101600" marT="63500" marB="63500" anchor="ctr">
@@ -23409,28 +23423,28 @@
                         <a:buNone/>
                       </a:pPr>
                       <a:r>
-                        <a:rPr lang="en-US" sz="1600" dirty="0">
+                        <a:rPr lang="en-US" sz="1700" dirty="0">
                           <a:solidFill>
                             <a:schemeClr val="tx1"/>
                           </a:solidFill>
                         </a:rPr>
                         <a:t>LAIP at diagnosis plus</a:t>
                       </a:r>
-                      <a:endParaRPr lang="en-US" sz="1600" dirty="0"/>
-                    </a:p>
-                    <a:p>
-                      <a:pPr indent="0" marL="0">
-                        <a:buNone/>
-                      </a:pPr>
-                      <a:r>
-                        <a:rPr lang="en-US" sz="1600" dirty="0">
+                      <a:endParaRPr lang="en-US" sz="1700" dirty="0"/>
+                    </a:p>
+                    <a:p>
+                      <a:pPr indent="0" marL="0">
+                        <a:buNone/>
+                      </a:pPr>
+                      <a:r>
+                        <a:rPr lang="en-US" sz="1700" dirty="0">
                           <a:solidFill>
                             <a:schemeClr val="tx1"/>
                           </a:solidFill>
                         </a:rPr>
                         <a:t>different-from-normal (DfN)</a:t>
                       </a:r>
-                      <a:endParaRPr lang="en-US" sz="1600" dirty="0"/>
+                      <a:endParaRPr lang="en-US" sz="1700" dirty="0"/>
                     </a:p>
                   </a:txBody>
                   <a:tcPr marL="25400" marR="101600" marT="63500" marB="63500" anchor="ctr">
@@ -23463,28 +23477,28 @@
                         <a:buNone/>
                       </a:pPr>
                       <a:r>
-                        <a:rPr lang="en-US" sz="1600" dirty="0">
+                        <a:rPr lang="en-US" sz="1700" dirty="0">
                           <a:solidFill>
                             <a:schemeClr val="tx1"/>
                           </a:solidFill>
                         </a:rPr>
                         <a:t>Background LAIP caps</a:t>
                       </a:r>
-                      <a:endParaRPr lang="en-US" sz="1600" dirty="0"/>
-                    </a:p>
-                    <a:p>
-                      <a:pPr indent="0" marL="0">
-                        <a:buNone/>
-                      </a:pPr>
-                      <a:r>
-                        <a:rPr lang="en-US" sz="1600" dirty="0">
+                      <a:endParaRPr lang="en-US" sz="1700" dirty="0"/>
+                    </a:p>
+                    <a:p>
+                      <a:pPr indent="0" marL="0">
+                        <a:buNone/>
+                      </a:pPr>
+                      <a:r>
+                        <a:rPr lang="en-US" sz="1700" dirty="0">
                           <a:solidFill>
                             <a:schemeClr val="tx1"/>
                           </a:solidFill>
                         </a:rPr>
                         <a:t>sensitivity near 1:10,000</a:t>
                       </a:r>
-                      <a:endParaRPr lang="en-US" sz="1600" dirty="0"/>
+                      <a:endParaRPr lang="en-US" sz="1700" dirty="0"/>
                     </a:p>
                   </a:txBody>
                   <a:tcPr marL="25400" marR="101600" marT="63500" marB="63500" anchor="ctr">
@@ -23519,14 +23533,14 @@
                         <a:buNone/>
                       </a:pPr>
                       <a:r>
-                        <a:rPr lang="en-US" sz="1600" dirty="0">
+                        <a:rPr lang="en-US" sz="1700" dirty="0">
                           <a:solidFill>
                             <a:schemeClr val="tx1"/>
                           </a:solidFill>
                         </a:rPr>
                         <a:t>NGS, diagnostic mutations</a:t>
                       </a:r>
-                      <a:endParaRPr lang="en-US" sz="1600" dirty="0"/>
+                      <a:endParaRPr lang="en-US" sz="1700" dirty="0"/>
                     </a:p>
                   </a:txBody>
                   <a:tcPr marL="25400" marR="101600" marT="63500" marB="63500" anchor="ctr">
@@ -23559,14 +23573,14 @@
                         <a:buNone/>
                       </a:pPr>
                       <a:r>
-                        <a:rPr lang="en-US" sz="1600" dirty="0">
+                        <a:rPr lang="en-US" sz="1700" dirty="0">
                           <a:solidFill>
                             <a:schemeClr val="tx1"/>
                           </a:solidFill>
                         </a:rPr>
                         <a:t>Multigene panel</a:t>
                       </a:r>
-                      <a:endParaRPr lang="en-US" sz="1600" dirty="0"/>
+                      <a:endParaRPr lang="en-US" sz="1700" dirty="0"/>
                     </a:p>
                   </a:txBody>
                   <a:tcPr marL="25400" marR="101600" marT="63500" marB="63500" anchor="ctr">
@@ -23599,28 +23613,28 @@
                         <a:buNone/>
                       </a:pPr>
                       <a:r>
-                        <a:rPr lang="en-US" sz="1600" dirty="0">
+                        <a:rPr lang="en-US" sz="1700" dirty="0">
                           <a:solidFill>
                             <a:schemeClr val="tx1"/>
                           </a:solidFill>
                         </a:rPr>
                         <a:t>Patient-specific mutations;</a:t>
                       </a:r>
-                      <a:endParaRPr lang="en-US" sz="1600" dirty="0"/>
-                    </a:p>
-                    <a:p>
-                      <a:pPr indent="0" marL="0">
-                        <a:buNone/>
-                      </a:pPr>
-                      <a:r>
-                        <a:rPr lang="en-US" sz="1600" dirty="0">
+                      <a:endParaRPr lang="en-US" sz="1700" dirty="0"/>
+                    </a:p>
+                    <a:p>
+                      <a:pPr indent="0" marL="0">
+                        <a:buNone/>
+                      </a:pPr>
+                      <a:r>
+                        <a:rPr lang="en-US" sz="1700" dirty="0">
                           <a:solidFill>
                             <a:schemeClr val="tx1"/>
                           </a:solidFill>
                         </a:rPr>
                         <a:t>mostly exploratory</a:t>
                       </a:r>
-                      <a:endParaRPr lang="en-US" sz="1600" dirty="0"/>
+                      <a:endParaRPr lang="en-US" sz="1700" dirty="0"/>
                     </a:p>
                   </a:txBody>
                   <a:tcPr marL="25400" marR="101600" marT="63500" marB="63500" anchor="ctr">
@@ -23653,28 +23667,28 @@
                         <a:buNone/>
                       </a:pPr>
                       <a:r>
-                        <a:rPr lang="en-US" sz="1600" dirty="0">
+                        <a:rPr lang="en-US" sz="1700" dirty="0">
                           <a:solidFill>
                             <a:schemeClr val="tx1"/>
                           </a:solidFill>
                         </a:rPr>
                         <a:t>Exclude germline and</a:t>
                       </a:r>
-                      <a:endParaRPr lang="en-US" sz="1600" dirty="0"/>
-                    </a:p>
-                    <a:p>
-                      <a:pPr indent="0" marL="0">
-                        <a:buNone/>
-                      </a:pPr>
-                      <a:r>
-                        <a:rPr lang="en-US" sz="1600" dirty="0">
+                      <a:endParaRPr lang="en-US" sz="1700" dirty="0"/>
+                    </a:p>
+                    <a:p>
+                      <a:pPr indent="0" marL="0">
+                        <a:buNone/>
+                      </a:pPr>
+                      <a:r>
+                        <a:rPr lang="en-US" sz="1700" dirty="0">
                           <a:solidFill>
                             <a:schemeClr val="tx1"/>
                           </a:solidFill>
                         </a:rPr>
                         <a:t>DTA mutations</a:t>
                       </a:r>
-                      <a:endParaRPr lang="en-US" sz="1600" dirty="0"/>
+                      <a:endParaRPr lang="en-US" sz="1700" dirty="0"/>
                     </a:p>
                   </a:txBody>
                   <a:tcPr marL="25400" marR="101600" marT="63500" marB="63500" anchor="ctr">
@@ -23709,14 +23723,14 @@
                         <a:buNone/>
                       </a:pPr>
                       <a:r>
-                        <a:rPr lang="en-US" sz="1600" dirty="0">
+                        <a:rPr lang="en-US" sz="1700" dirty="0">
                           <a:solidFill>
                             <a:schemeClr val="tx1"/>
                           </a:solidFill>
                         </a:rPr>
                         <a:t>NGS for FLT3-ITD</a:t>
                       </a:r>
-                      <a:endParaRPr lang="en-US" sz="1600" dirty="0"/>
+                      <a:endParaRPr lang="en-US" sz="1700" dirty="0"/>
                     </a:p>
                   </a:txBody>
                   <a:tcPr marL="25400" marR="101600" marT="63500" marB="63500" anchor="ctr">
@@ -23749,14 +23763,14 @@
                         <a:buNone/>
                       </a:pPr>
                       <a:r>
-                        <a:rPr lang="en-US" sz="1600" dirty="0">
+                        <a:rPr lang="en-US" sz="1700" dirty="0">
                           <a:solidFill>
                             <a:schemeClr val="tx1"/>
                           </a:solidFill>
                         </a:rPr>
                         <a:t>FLT3-ITD-positive AML</a:t>
                       </a:r>
-                      <a:endParaRPr lang="en-US" sz="1600" dirty="0"/>
+                      <a:endParaRPr lang="en-US" sz="1700" dirty="0"/>
                     </a:p>
                   </a:txBody>
                   <a:tcPr marL="25400" marR="101600" marT="63500" marB="63500" anchor="ctr">
@@ -23789,28 +23803,28 @@
                         <a:buNone/>
                       </a:pPr>
                       <a:r>
-                        <a:rPr lang="en-US" sz="1600" dirty="0">
+                        <a:rPr lang="en-US" sz="1700" dirty="0">
                           <a:solidFill>
                             <a:schemeClr val="tx1"/>
                           </a:solidFill>
                         </a:rPr>
                         <a:t>Bioinformatic ITD calling</a:t>
                       </a:r>
-                      <a:endParaRPr lang="en-US" sz="1600" dirty="0"/>
-                    </a:p>
-                    <a:p>
-                      <a:pPr indent="0" marL="0">
-                        <a:buNone/>
-                      </a:pPr>
-                      <a:r>
-                        <a:rPr lang="en-US" sz="1600" dirty="0">
+                      <a:endParaRPr lang="en-US" sz="1700" dirty="0"/>
+                    </a:p>
+                    <a:p>
+                      <a:pPr indent="0" marL="0">
+                        <a:buNone/>
+                      </a:pPr>
+                      <a:r>
+                        <a:rPr lang="en-US" sz="1700" dirty="0">
                           <a:solidFill>
                             <a:schemeClr val="tx1"/>
                           </a:solidFill>
                         </a:rPr>
                         <a:t>after induction</a:t>
                       </a:r>
-                      <a:endParaRPr lang="en-US" sz="1600" dirty="0"/>
+                      <a:endParaRPr lang="en-US" sz="1700" dirty="0"/>
                     </a:p>
                   </a:txBody>
                   <a:tcPr marL="25400" marR="101600" marT="63500" marB="63500" anchor="ctr">
@@ -23843,28 +23857,28 @@
                         <a:buNone/>
                       </a:pPr>
                       <a:r>
-                        <a:rPr lang="en-US" sz="1600" dirty="0">
+                        <a:rPr lang="en-US" sz="1700" dirty="0">
                           <a:solidFill>
                             <a:schemeClr val="tx1"/>
                           </a:solidFill>
                         </a:rPr>
                         <a:t>MRD ≥ 0.01% clearly</a:t>
                       </a:r>
-                      <a:endParaRPr lang="en-US" sz="1600" dirty="0"/>
-                    </a:p>
-                    <a:p>
-                      <a:pPr indent="0" marL="0">
-                        <a:buNone/>
-                      </a:pPr>
-                      <a:r>
-                        <a:rPr lang="en-US" sz="1600" dirty="0">
+                      <a:endParaRPr lang="en-US" sz="1700" dirty="0"/>
+                    </a:p>
+                    <a:p>
+                      <a:pPr indent="0" marL="0">
+                        <a:buNone/>
+                      </a:pPr>
+                      <a:r>
+                        <a:rPr lang="en-US" sz="1700" dirty="0">
                           <a:solidFill>
                             <a:schemeClr val="tx1"/>
                           </a:solidFill>
                         </a:rPr>
                         <a:t>linked to outcome</a:t>
                       </a:r>
-                      <a:endParaRPr lang="en-US" sz="1600" dirty="0"/>
+                      <a:endParaRPr lang="en-US" sz="1700" dirty="0"/>
                     </a:p>
                   </a:txBody>
                   <a:tcPr marL="25400" marR="101600" marT="63500" marB="63500" anchor="ctr">
@@ -25401,7 +25415,7 @@
                   <a:schemeClr val="tx1"/>
                 </a:solidFill>
               </a:rPr>
-              <a:t>Speaker's summary: MAC helped only MRD-positive patients. MRD is prognostic after MAC and non-MAC, in CR1 and CR2.</a:t>
+              <a:t>Speaker's summary: MAC helped only MRD-positive patients; MRD is prognostic in CR1 and CR2</a:t>
             </a:r>
             <a:endParaRPr lang="en-US" sz="1600" dirty="0"/>
           </a:p>
@@ -26625,7 +26639,7 @@
                   <a:schemeClr val="tx1"/>
                 </a:solidFill>
               </a:rPr>
-              <a:t>From day +90–100, off IS, GVHD-free ~1 month</a:t>
+              <a:t>Day +90–100; off IS; no GVHD for ~1 month</a:t>
             </a:r>
             <a:endParaRPr lang="en-US" sz="1500" dirty="0"/>
           </a:p>
@@ -26965,7 +26979,7 @@
                   <a:schemeClr val="tx1"/>
                 </a:solidFill>
               </a:rPr>
-              <a:t>Chemotherapy plus DLI about 1 × 10⁷/kg</a:t>
+              <a:t>Chemotherapy, then DLI 1 × 10⁷/kg</a:t>
             </a:r>
             <a:endParaRPr lang="en-US" sz="1500" dirty="0"/>
           </a:p>

--- a/slides/decks/s13-relapse-mrd-dli.pptx
+++ b/slides/decks/s13-relapse-mrd-dli.pptx
@@ -135,13 +135,13 @@
   <p:extLst>
     <p:ext uri="{521415D9-36F7-43E2-AB2F-B90AF26B5E84}">
       <p14:sectionLst xmlns:p14="http://schemas.microsoft.com/office/powerpoint/2010/main">
-        <p14:section name="Opening" id="{a0d9b5df-f107-47b4-7828-c2301a05bf76}">
+        <p14:section name="Opening" id="{91a4fc75-55fe-c141-47d1-d67757c2de7b}">
           <p14:sldIdLst>
             <p14:sldId id="256"/>
             <p14:sldId id="257"/>
           </p14:sldIdLst>
         </p14:section>
-        <p14:section name="MRD" id="{8f968b21-a455-f3cf-45dc-3357fb2d73ec}">
+        <p14:section name="MRD" id="{5d1d0d8d-3d83-b2f3-f825-b5881087e0c1}">
           <p14:sldIdLst>
             <p14:sldId id="258"/>
             <p14:sldId id="259"/>
@@ -151,7 +151,7 @@
             <p14:sldId id="263"/>
           </p14:sldIdLst>
         </p14:section>
-        <p14:section name="Drugs" id="{4bdea69e-ca92-3bc5-1eae-2f604c11e631}">
+        <p14:section name="Drugs" id="{483cff82-7cb0-7f7b-d930-0a88a15dd430}">
           <p14:sldIdLst>
             <p14:sldId id="264"/>
             <p14:sldId id="265"/>
@@ -160,14 +160,14 @@
             <p14:sldId id="268"/>
           </p14:sldIdLst>
         </p14:section>
-        <p14:section name="Donor lymphocyte infusion" id="{38381842-ad12-20f0-3654-71b4945b698b}">
+        <p14:section name="Donor lymphocyte infusion" id="{944ada50-9d9c-168d-03a8-72607e3fec6a}">
           <p14:sldIdLst>
             <p14:sldId id="269"/>
             <p14:sldId id="270"/>
             <p14:sldId id="271"/>
           </p14:sldIdLst>
         </p14:section>
-        <p14:section name="Board questions" id="{6ba59ab6-9a07-0e2e-dccf-7dd81ee0d3e2}">
+        <p14:section name="Board questions" id="{3aa60ae8-43ac-bd9e-c72d-60dfb9b1da4f}">
           <p14:sldIdLst>
             <p14:sldId id="272"/>
             <p14:sldId id="273"/>
@@ -177,7 +177,7 @@
             <p14:sldId id="277"/>
           </p14:sldIdLst>
         </p14:section>
-        <p14:section name="References" id="{51237134-4cd1-1277-62e2-2a50c12a37a3}">
+        <p14:section name="References" id="{bfdee89b-ca51-4653-c6d7-7524a8dca9de}">
           <p14:sldIdLst>
             <p14:sldId id="278"/>
             <p14:sldId id="279"/>
@@ -185,7 +185,7 @@
             <p14:sldId id="281"/>
           </p14:sldIdLst>
         </p14:section>
-        <p14:section name="Backup" id="{056d1003-5be7-487a-7361-0e249248b654}">
+        <p14:section name="Backup" id="{61ba38a2-3139-c14b-fe6d-4ee45cfc4a28}">
           <p14:sldIdLst>
             <p14:sldId id="282"/>
             <p14:sldId id="283"/>
